--- a/submit/02_答辩材料_v1.pptx
+++ b/submit/02_答辩材料_v1.pptx
@@ -1607,6 +1607,10 @@
           </a:solidFill>
           <a:ln/>
         </p:spPr>
+        <p:txBody>
+          <a:bodyPr/>
+          <a:p/>
+        </p:txBody>
       </p:sp>
       <p:sp>
         <p:nvSpPr>
@@ -2137,6 +2141,10 @@
             <a:prstDash val="solid"/>
           </a:ln>
         </p:spPr>
+        <p:txBody>
+          <a:bodyPr/>
+          <a:p/>
+        </p:txBody>
       </p:sp>
       <p:sp>
         <p:nvSpPr>
@@ -2157,6 +2165,10 @@
           </a:solidFill>
           <a:ln/>
         </p:spPr>
+        <p:txBody>
+          <a:bodyPr/>
+          <a:p/>
+        </p:txBody>
       </p:sp>
       <p:sp>
         <p:nvSpPr>
@@ -2279,6 +2291,10 @@
             <a:prstDash val="solid"/>
           </a:ln>
         </p:spPr>
+        <p:txBody>
+          <a:bodyPr/>
+          <a:p/>
+        </p:txBody>
       </p:sp>
       <p:sp>
         <p:nvSpPr>
@@ -2299,6 +2315,10 @@
           </a:solidFill>
           <a:ln/>
         </p:spPr>
+        <p:txBody>
+          <a:bodyPr/>
+          <a:p/>
+        </p:txBody>
       </p:sp>
       <p:sp>
         <p:nvSpPr>
@@ -2421,6 +2441,10 @@
             <a:prstDash val="solid"/>
           </a:ln>
         </p:spPr>
+        <p:txBody>
+          <a:bodyPr/>
+          <a:p/>
+        </p:txBody>
       </p:sp>
       <p:sp>
         <p:nvSpPr>
@@ -2441,6 +2465,10 @@
           </a:solidFill>
           <a:ln/>
         </p:spPr>
+        <p:txBody>
+          <a:bodyPr/>
+          <a:p/>
+        </p:txBody>
       </p:sp>
       <p:sp>
         <p:nvSpPr>
@@ -2563,6 +2591,10 @@
             <a:prstDash val="solid"/>
           </a:ln>
         </p:spPr>
+        <p:txBody>
+          <a:bodyPr/>
+          <a:p/>
+        </p:txBody>
       </p:sp>
       <p:sp>
         <p:nvSpPr>
@@ -2583,6 +2615,10 @@
           </a:solidFill>
           <a:ln/>
         </p:spPr>
+        <p:txBody>
+          <a:bodyPr/>
+          <a:p/>
+        </p:txBody>
       </p:sp>
       <p:sp>
         <p:nvSpPr>
@@ -2932,6 +2968,10 @@
             <a:prstDash val="solid"/>
           </a:ln>
         </p:spPr>
+        <p:txBody>
+          <a:bodyPr/>
+          <a:p/>
+        </p:txBody>
       </p:sp>
       <p:sp>
         <p:nvSpPr>
@@ -3132,6 +3172,10 @@
             <a:prstDash val="solid"/>
           </a:ln>
         </p:spPr>
+        <p:txBody>
+          <a:bodyPr/>
+          <a:p/>
+        </p:txBody>
       </p:sp>
       <p:sp>
         <p:nvSpPr>
@@ -3332,6 +3376,10 @@
             <a:prstDash val="solid"/>
           </a:ln>
         </p:spPr>
+        <p:txBody>
+          <a:bodyPr/>
+          <a:p/>
+        </p:txBody>
       </p:sp>
       <p:sp>
         <p:nvSpPr>
@@ -3532,6 +3580,10 @@
             <a:prstDash val="solid"/>
           </a:ln>
         </p:spPr>
+        <p:txBody>
+          <a:bodyPr/>
+          <a:p/>
+        </p:txBody>
       </p:sp>
       <p:sp>
         <p:nvSpPr>
@@ -3693,6 +3745,10 @@
             <a:prstDash val="solid"/>
           </a:ln>
         </p:spPr>
+        <p:txBody>
+          <a:bodyPr/>
+          <a:p/>
+        </p:txBody>
       </p:sp>
       <p:sp>
         <p:nvSpPr>
@@ -4029,6 +4085,10 @@
             <a:prstDash val="solid"/>
           </a:ln>
         </p:spPr>
+        <p:txBody>
+          <a:bodyPr/>
+          <a:p/>
+        </p:txBody>
       </p:sp>
       <p:sp>
         <p:nvSpPr>
@@ -4173,6 +4233,10 @@
             <a:prstDash val="solid"/>
           </a:ln>
         </p:spPr>
+        <p:txBody>
+          <a:bodyPr/>
+          <a:p/>
+        </p:txBody>
       </p:sp>
       <p:sp>
         <p:nvSpPr>
@@ -4317,6 +4381,10 @@
             <a:prstDash val="solid"/>
           </a:ln>
         </p:spPr>
+        <p:txBody>
+          <a:bodyPr/>
+          <a:p/>
+        </p:txBody>
       </p:sp>
       <p:sp>
         <p:nvSpPr>
@@ -4461,6 +4529,10 @@
             <a:prstDash val="solid"/>
           </a:ln>
         </p:spPr>
+        <p:txBody>
+          <a:bodyPr/>
+          <a:p/>
+        </p:txBody>
       </p:sp>
       <p:sp>
         <p:nvSpPr>
@@ -4605,6 +4677,10 @@
             <a:prstDash val="solid"/>
           </a:ln>
         </p:spPr>
+        <p:txBody>
+          <a:bodyPr/>
+          <a:p/>
+        </p:txBody>
       </p:sp>
       <p:sp>
         <p:nvSpPr>
@@ -4710,6 +4786,10 @@
             <a:prstDash val="solid"/>
           </a:ln>
         </p:spPr>
+        <p:txBody>
+          <a:bodyPr/>
+          <a:p/>
+        </p:txBody>
       </p:sp>
       <p:sp>
         <p:nvSpPr>
@@ -4815,6 +4895,10 @@
             <a:prstDash val="solid"/>
           </a:ln>
         </p:spPr>
+        <p:txBody>
+          <a:bodyPr/>
+          <a:p/>
+        </p:txBody>
       </p:sp>
       <p:sp>
         <p:nvSpPr>
@@ -4920,6 +5004,10 @@
             <a:prstDash val="solid"/>
           </a:ln>
         </p:spPr>
+        <p:txBody>
+          <a:bodyPr/>
+          <a:p/>
+        </p:txBody>
       </p:sp>
       <p:sp>
         <p:nvSpPr>
@@ -5025,6 +5113,10 @@
             <a:prstDash val="solid"/>
           </a:ln>
         </p:spPr>
+        <p:txBody>
+          <a:bodyPr/>
+          <a:p/>
+        </p:txBody>
       </p:sp>
       <p:sp>
         <p:nvSpPr>
@@ -5130,6 +5222,10 @@
             <a:prstDash val="solid"/>
           </a:ln>
         </p:spPr>
+        <p:txBody>
+          <a:bodyPr/>
+          <a:p/>
+        </p:txBody>
       </p:sp>
       <p:sp>
         <p:nvSpPr>
@@ -5203,7 +5299,7 @@
                 <a:ea typeface="Noto Sans CJK SC" pitchFamily="34" charset="-122"/>
                 <a:cs typeface="Noto Sans CJK SC" pitchFamily="34" charset="-120"/>
               </a:rPr>
-              <a:t>83 passed（pytest）</a:t>
+              <a:t>128 passed（pytest）</a:t>
             </a:r>
             <a:endParaRPr lang="en-US" sz="1300" dirty="0"/>
           </a:p>
@@ -5235,6 +5331,10 @@
             <a:prstDash val="solid"/>
           </a:ln>
         </p:spPr>
+        <p:txBody>
+          <a:bodyPr/>
+          <a:p/>
+        </p:txBody>
       </p:sp>
       <p:sp>
         <p:nvSpPr>
@@ -5528,6 +5628,10 @@
             <a:prstDash val="solid"/>
           </a:ln>
         </p:spPr>
+        <p:txBody>
+          <a:bodyPr/>
+          <a:p/>
+        </p:txBody>
       </p:sp>
       <p:sp>
         <p:nvSpPr>
@@ -5548,6 +5652,10 @@
           </a:solidFill>
           <a:ln/>
         </p:spPr>
+        <p:txBody>
+          <a:bodyPr/>
+          <a:p/>
+        </p:txBody>
       </p:sp>
       <p:sp>
         <p:nvSpPr>
@@ -5809,6 +5917,10 @@
             <a:prstDash val="solid"/>
           </a:ln>
         </p:spPr>
+        <p:txBody>
+          <a:bodyPr/>
+          <a:p/>
+        </p:txBody>
       </p:sp>
       <p:sp>
         <p:nvSpPr>
@@ -5829,6 +5941,10 @@
           </a:solidFill>
           <a:ln/>
         </p:spPr>
+        <p:txBody>
+          <a:bodyPr/>
+          <a:p/>
+        </p:txBody>
       </p:sp>
       <p:sp>
         <p:nvSpPr>
@@ -6090,6 +6206,10 @@
             <a:prstDash val="solid"/>
           </a:ln>
         </p:spPr>
+        <p:txBody>
+          <a:bodyPr/>
+          <a:p/>
+        </p:txBody>
       </p:sp>
       <p:sp>
         <p:nvSpPr>
@@ -6110,6 +6230,10 @@
           </a:solidFill>
           <a:ln/>
         </p:spPr>
+        <p:txBody>
+          <a:bodyPr/>
+          <a:p/>
+        </p:txBody>
       </p:sp>
       <p:sp>
         <p:nvSpPr>
@@ -7605,6 +7729,10 @@
             <a:prstDash val="solid"/>
           </a:ln>
         </p:spPr>
+        <p:txBody>
+          <a:bodyPr/>
+          <a:p/>
+        </p:txBody>
       </p:sp>
       <p:sp>
         <p:nvSpPr>
@@ -7749,6 +7877,10 @@
             <a:prstDash val="solid"/>
           </a:ln>
         </p:spPr>
+        <p:txBody>
+          <a:bodyPr/>
+          <a:p/>
+        </p:txBody>
       </p:sp>
       <p:sp>
         <p:nvSpPr>
@@ -7893,6 +8025,10 @@
             <a:prstDash val="solid"/>
           </a:ln>
         </p:spPr>
+        <p:txBody>
+          <a:bodyPr/>
+          <a:p/>
+        </p:txBody>
       </p:sp>
       <p:sp>
         <p:nvSpPr>
@@ -8037,6 +8173,10 @@
             <a:prstDash val="solid"/>
           </a:ln>
         </p:spPr>
+        <p:txBody>
+          <a:bodyPr/>
+          <a:p/>
+        </p:txBody>
       </p:sp>
       <p:sp>
         <p:nvSpPr>
@@ -8181,6 +8321,10 @@
             <a:prstDash val="solid"/>
           </a:ln>
         </p:spPr>
+        <p:txBody>
+          <a:bodyPr/>
+          <a:p/>
+        </p:txBody>
       </p:sp>
       <p:sp>
         <p:nvSpPr>
@@ -8271,7 +8415,7 @@
                 <a:ea typeface="Noto Sans CJK SC" pitchFamily="34" charset="-122"/>
                 <a:cs typeface="Noto Sans CJK SC" pitchFamily="34" charset="-120"/>
               </a:rPr>
-              <a:t>单测当前 83 passed  ·  对抗集 103 条真跑  ·  指标口径【待依灵确认】前不对外签章引用</a:t>
+              <a:t>单测当前 128 passed  ·  对抗集 103 条真跑  ·  指标口径【待依灵确认】前不对外签章引用</a:t>
             </a:r>
             <a:endParaRPr lang="en-US" sz="1400" dirty="0"/>
           </a:p>
@@ -8569,6 +8713,10 @@
             <a:prstDash val="solid"/>
           </a:ln>
         </p:spPr>
+        <p:txBody>
+          <a:bodyPr/>
+          <a:p/>
+        </p:txBody>
       </p:sp>
       <p:sp>
         <p:nvSpPr>
@@ -8674,6 +8822,10 @@
             <a:prstDash val="solid"/>
           </a:ln>
         </p:spPr>
+        <p:txBody>
+          <a:bodyPr/>
+          <a:p/>
+        </p:txBody>
       </p:sp>
       <p:sp>
         <p:nvSpPr>
@@ -8779,6 +8931,10 @@
             <a:prstDash val="solid"/>
           </a:ln>
         </p:spPr>
+        <p:txBody>
+          <a:bodyPr/>
+          <a:p/>
+        </p:txBody>
       </p:sp>
       <p:sp>
         <p:nvSpPr>
@@ -8884,6 +9040,10 @@
             <a:prstDash val="solid"/>
           </a:ln>
         </p:spPr>
+        <p:txBody>
+          <a:bodyPr/>
+          <a:p/>
+        </p:txBody>
       </p:sp>
       <p:sp>
         <p:nvSpPr>
@@ -8989,6 +9149,10 @@
             <a:prstDash val="solid"/>
           </a:ln>
         </p:spPr>
+        <p:txBody>
+          <a:bodyPr/>
+          <a:p/>
+        </p:txBody>
       </p:sp>
       <p:sp>
         <p:nvSpPr>
@@ -9094,6 +9258,10 @@
             <a:prstDash val="solid"/>
           </a:ln>
         </p:spPr>
+        <p:txBody>
+          <a:bodyPr/>
+          <a:p/>
+        </p:txBody>
       </p:sp>
       <p:sp>
         <p:nvSpPr>
@@ -9199,6 +9367,10 @@
             <a:prstDash val="solid"/>
           </a:ln>
         </p:spPr>
+        <p:txBody>
+          <a:bodyPr/>
+          <a:p/>
+        </p:txBody>
       </p:sp>
       <p:sp>
         <p:nvSpPr>
@@ -9304,6 +9476,10 @@
             <a:prstDash val="solid"/>
           </a:ln>
         </p:spPr>
+        <p:txBody>
+          <a:bodyPr/>
+          <a:p/>
+        </p:txBody>
       </p:sp>
       <p:sp>
         <p:nvSpPr>
@@ -9512,6 +9688,10 @@
           </a:solidFill>
           <a:ln/>
         </p:spPr>
+        <p:txBody>
+          <a:bodyPr/>
+          <a:p/>
+        </p:txBody>
       </p:sp>
       <p:sp>
         <p:nvSpPr>
@@ -9690,6 +9870,10 @@
             <a:prstDash val="solid"/>
           </a:ln>
         </p:spPr>
+        <p:txBody>
+          <a:bodyPr/>
+          <a:p/>
+        </p:txBody>
       </p:sp>
       <p:sp>
         <p:nvSpPr>

--- a/submit/02_答辩材料_v1.pptx
+++ b/submit/02_答辩材料_v1.pptx
@@ -4,9 +4,6 @@
   <p:sldMasterIdLst>
     <p:sldMasterId id="2147483648" r:id="rId1"/>
   </p:sldMasterIdLst>
-  <p:notesMasterIdLst>
-    <p:notesMasterId r:id="rId11"/>
-  </p:notesMasterIdLst>
   <p:sldIdLst>
     <p:sldId id="256" r:id="rId2"/>
     <p:sldId id="257" r:id="rId3"/>
@@ -17,8 +14,10 @@
     <p:sldId id="262" r:id="rId8"/>
     <p:sldId id="263" r:id="rId9"/>
     <p:sldId id="264" r:id="rId10"/>
-    <p:sldId id="265" r:id="rId16"/>
   </p:sldIdLst>
+  <p:notesMasterIdLst>
+    <p:notesMasterId r:id="rId11"/>
+  </p:notesMasterIdLst>
   <p:sldSz cx="12192000" cy="6858000"/>
   <p:notesSz cx="6858000" cy="12192000"/>
   <p:defaultTextStyle>
@@ -1607,10 +1606,6 @@
           </a:solidFill>
           <a:ln/>
         </p:spPr>
-        <p:txBody>
-          <a:bodyPr/>
-          <a:p/>
-        </p:txBody>
       </p:sp>
       <p:sp>
         <p:nvSpPr>
@@ -1824,7 +1819,7 @@
                 <a:ea typeface="Noto Sans CJK SC" pitchFamily="34" charset="-122"/>
                 <a:cs typeface="Noto Sans CJK SC" pitchFamily="34" charset="-120"/>
               </a:rPr>
-              <a:t>答辩材料 v0  ·  约 8–10 分钟  ·  2026-10-18</a:t>
+              <a:t>答辩材料 v1  ·  约 8–10 分钟  ·  2026-10-20</a:t>
             </a:r>
             <a:endParaRPr lang="en-US" sz="1300" dirty="0"/>
           </a:p>
@@ -1925,83 +1920,6 @@
               <a:t>1 / 9</a:t>
             </a:r>
             <a:endParaRPr lang="en-US" sz="1000" dirty="0"/>
-          </a:p>
-        </p:txBody>
-      </p:sp>
-    </p:spTree>
-  </p:cSld>
-  <p:clrMapOvr>
-    <a:masterClrMapping/>
-  </p:clrMapOvr>
-</p:sld>
-</file>
-
-<file path=ppt/slides/slide10.xml><?xml version="1.0" encoding="utf-8"?>
-<p:sld xmlns:a="http://schemas.openxmlformats.org/drawingml/2006/main" xmlns:p="http://schemas.openxmlformats.org/presentationml/2006/main" xmlns:r="http://schemas.openxmlformats.org/officeDocument/2006/relationships">
-  <p:cSld>
-    <p:spTree>
-      <p:nvGrpSpPr>
-        <p:cNvPr id="1" name=""/>
-        <p:cNvGrpSpPr/>
-        <p:nvPr/>
-      </p:nvGrpSpPr>
-      <p:grpSpPr/>
-      <p:sp>
-        <p:nvSpPr>
-          <p:cNvPr id="2" name="TextBox 1"/>
-          <p:cNvSpPr txBox="1"/>
-          <p:nvPr/>
-        </p:nvSpPr>
-        <p:spPr>
-          <a:xfrm>
-            <a:off x="457200" y="365760"/>
-            <a:ext cx="11277600" cy="6126480"/>
-          </a:xfrm>
-          <a:prstGeom prst="rect">
-            <a:avLst/>
-          </a:prstGeom>
-          <a:noFill/>
-        </p:spPr>
-        <p:txBody>
-          <a:bodyPr wrap="square">
-            <a:spAutoFit/>
-          </a:bodyPr>
-          <a:lstStyle/>
-          <a:p>
-            <a:r>
-              <a:rPr sz="2800" b="1"/>
-              <a:t>W1 进展 · Demo Web 现场可点</a:t>
-            </a:r>
-          </a:p>
-          <a:p>
-            <a:r>
-              <a:rPr sz="1500"/>
-              <a:t>• W1 新增：订阅管理场景（写操作生成 PendingAction，需用户「确认」后执行，可「取消」，会话隔离、过期失效）。</a:t>
-            </a:r>
-          </a:p>
-          <a:p>
-            <a:r>
-              <a:rPr sz="1500"/>
-              <a:t>• W1 新增：跨场景闭环——账单洞察（list_bills）→ 货基建议（suggest_product）→ 可选转账确认；洞察轮零资金写工具调用。</a:t>
-            </a:r>
-          </a:p>
-          <a:p>
-            <a:r>
-              <a:rPr sz="1500"/>
-              <a:t>• Demo Web（Gradio，demo_web/app.py）：四按钮——稳健理财放行 / 订阅二次确认 / 账单洞察→货基 / 保本诱导拦截；实时展示意图、计划、工具调用与 reason codes 审计轨迹。</a:t>
-            </a:r>
-          </a:p>
-          <a:p>
-            <a:r>
-              <a:rPr sz="1500"/>
-              <a:t>• 测试：pytest 128 passed；评测集 v1 173 条 P142/F29/SKIP2（严格 82.1%，未美化）；对抗集 113 条 P89/F18。</a:t>
-            </a:r>
-          </a:p>
-          <a:p>
-            <a:r>
-              <a:rPr sz="1500"/>
-              <a:t>• 开源仓库：https://github.com/chengxi562-hue/fintechathon-compliance-agent（MIT，合成数据，无密钥/PII）。</a:t>
-            </a:r>
           </a:p>
         </p:txBody>
       </p:sp>
@@ -2141,10 +2059,6 @@
             <a:prstDash val="solid"/>
           </a:ln>
         </p:spPr>
-        <p:txBody>
-          <a:bodyPr/>
-          <a:p/>
-        </p:txBody>
       </p:sp>
       <p:sp>
         <p:nvSpPr>
@@ -2165,10 +2079,6 @@
           </a:solidFill>
           <a:ln/>
         </p:spPr>
-        <p:txBody>
-          <a:bodyPr/>
-          <a:p/>
-        </p:txBody>
       </p:sp>
       <p:sp>
         <p:nvSpPr>
@@ -2291,10 +2201,6 @@
             <a:prstDash val="solid"/>
           </a:ln>
         </p:spPr>
-        <p:txBody>
-          <a:bodyPr/>
-          <a:p/>
-        </p:txBody>
       </p:sp>
       <p:sp>
         <p:nvSpPr>
@@ -2315,10 +2221,6 @@
           </a:solidFill>
           <a:ln/>
         </p:spPr>
-        <p:txBody>
-          <a:bodyPr/>
-          <a:p/>
-        </p:txBody>
       </p:sp>
       <p:sp>
         <p:nvSpPr>
@@ -2441,10 +2343,6 @@
             <a:prstDash val="solid"/>
           </a:ln>
         </p:spPr>
-        <p:txBody>
-          <a:bodyPr/>
-          <a:p/>
-        </p:txBody>
       </p:sp>
       <p:sp>
         <p:nvSpPr>
@@ -2465,10 +2363,6 @@
           </a:solidFill>
           <a:ln/>
         </p:spPr>
-        <p:txBody>
-          <a:bodyPr/>
-          <a:p/>
-        </p:txBody>
       </p:sp>
       <p:sp>
         <p:nvSpPr>
@@ -2591,10 +2485,6 @@
             <a:prstDash val="solid"/>
           </a:ln>
         </p:spPr>
-        <p:txBody>
-          <a:bodyPr/>
-          <a:p/>
-        </p:txBody>
       </p:sp>
       <p:sp>
         <p:nvSpPr>
@@ -2615,10 +2505,6 @@
           </a:solidFill>
           <a:ln/>
         </p:spPr>
-        <p:txBody>
-          <a:bodyPr/>
-          <a:p/>
-        </p:txBody>
       </p:sp>
       <p:sp>
         <p:nvSpPr>
@@ -2968,10 +2854,6 @@
             <a:prstDash val="solid"/>
           </a:ln>
         </p:spPr>
-        <p:txBody>
-          <a:bodyPr/>
-          <a:p/>
-        </p:txBody>
       </p:sp>
       <p:sp>
         <p:nvSpPr>
@@ -3172,10 +3054,6 @@
             <a:prstDash val="solid"/>
           </a:ln>
         </p:spPr>
-        <p:txBody>
-          <a:bodyPr/>
-          <a:p/>
-        </p:txBody>
       </p:sp>
       <p:sp>
         <p:nvSpPr>
@@ -3376,10 +3254,6 @@
             <a:prstDash val="solid"/>
           </a:ln>
         </p:spPr>
-        <p:txBody>
-          <a:bodyPr/>
-          <a:p/>
-        </p:txBody>
       </p:sp>
       <p:sp>
         <p:nvSpPr>
@@ -3580,10 +3454,6 @@
             <a:prstDash val="solid"/>
           </a:ln>
         </p:spPr>
-        <p:txBody>
-          <a:bodyPr/>
-          <a:p/>
-        </p:txBody>
       </p:sp>
       <p:sp>
         <p:nvSpPr>
@@ -3745,10 +3615,6 @@
             <a:prstDash val="solid"/>
           </a:ln>
         </p:spPr>
-        <p:txBody>
-          <a:bodyPr/>
-          <a:p/>
-        </p:txBody>
       </p:sp>
       <p:sp>
         <p:nvSpPr>
@@ -4053,7 +3919,7 @@
                 <a:ea typeface="Noto Sans CJK SC" pitchFamily="34" charset="-122"/>
                 <a:cs typeface="Noto Sans CJK SC" pitchFamily="34" charset="-120"/>
               </a:rPr>
-              <a:t>W0 可运行骨架 · LangGraph-ready</a:t>
+              <a:t>W1 四场景可跑 · 131 条测试 · LangGraph-ready</a:t>
             </a:r>
             <a:endParaRPr lang="en-US" sz="2400" dirty="0"/>
           </a:p>
@@ -4085,10 +3951,6 @@
             <a:prstDash val="solid"/>
           </a:ln>
         </p:spPr>
-        <p:txBody>
-          <a:bodyPr/>
-          <a:p/>
-        </p:txBody>
       </p:sp>
       <p:sp>
         <p:nvSpPr>
@@ -4233,10 +4095,6 @@
             <a:prstDash val="solid"/>
           </a:ln>
         </p:spPr>
-        <p:txBody>
-          <a:bodyPr/>
-          <a:p/>
-        </p:txBody>
       </p:sp>
       <p:sp>
         <p:nvSpPr>
@@ -4381,10 +4239,6 @@
             <a:prstDash val="solid"/>
           </a:ln>
         </p:spPr>
-        <p:txBody>
-          <a:bodyPr/>
-          <a:p/>
-        </p:txBody>
       </p:sp>
       <p:sp>
         <p:nvSpPr>
@@ -4529,10 +4383,6 @@
             <a:prstDash val="solid"/>
           </a:ln>
         </p:spPr>
-        <p:txBody>
-          <a:bodyPr/>
-          <a:p/>
-        </p:txBody>
       </p:sp>
       <p:sp>
         <p:nvSpPr>
@@ -4677,10 +4527,6 @@
             <a:prstDash val="solid"/>
           </a:ln>
         </p:spPr>
-        <p:txBody>
-          <a:bodyPr/>
-          <a:p/>
-        </p:txBody>
       </p:sp>
       <p:sp>
         <p:nvSpPr>
@@ -4786,10 +4632,6 @@
             <a:prstDash val="solid"/>
           </a:ln>
         </p:spPr>
-        <p:txBody>
-          <a:bodyPr/>
-          <a:p/>
-        </p:txBody>
       </p:sp>
       <p:sp>
         <p:nvSpPr>
@@ -4895,10 +4737,6 @@
             <a:prstDash val="solid"/>
           </a:ln>
         </p:spPr>
-        <p:txBody>
-          <a:bodyPr/>
-          <a:p/>
-        </p:txBody>
       </p:sp>
       <p:sp>
         <p:nvSpPr>
@@ -5004,10 +4842,6 @@
             <a:prstDash val="solid"/>
           </a:ln>
         </p:spPr>
-        <p:txBody>
-          <a:bodyPr/>
-          <a:p/>
-        </p:txBody>
       </p:sp>
       <p:sp>
         <p:nvSpPr>
@@ -5113,10 +4947,6 @@
             <a:prstDash val="solid"/>
           </a:ln>
         </p:spPr>
-        <p:txBody>
-          <a:bodyPr/>
-          <a:p/>
-        </p:txBody>
       </p:sp>
       <p:sp>
         <p:nvSpPr>
@@ -5222,10 +5052,6 @@
             <a:prstDash val="solid"/>
           </a:ln>
         </p:spPr>
-        <p:txBody>
-          <a:bodyPr/>
-          <a:p/>
-        </p:txBody>
       </p:sp>
       <p:sp>
         <p:nvSpPr>
@@ -5299,7 +5125,7 @@
                 <a:ea typeface="Noto Sans CJK SC" pitchFamily="34" charset="-122"/>
                 <a:cs typeface="Noto Sans CJK SC" pitchFamily="34" charset="-120"/>
               </a:rPr>
-              <a:t>128 passed（pytest）</a:t>
+              <a:t>131 passed（pytest）</a:t>
             </a:r>
             <a:endParaRPr lang="en-US" sz="1300" dirty="0"/>
           </a:p>
@@ -5331,10 +5157,6 @@
             <a:prstDash val="solid"/>
           </a:ln>
         </p:spPr>
-        <p:txBody>
-          <a:bodyPr/>
-          <a:p/>
-        </p:txBody>
       </p:sp>
       <p:sp>
         <p:nvSpPr>
@@ -5628,10 +5450,6 @@
             <a:prstDash val="solid"/>
           </a:ln>
         </p:spPr>
-        <p:txBody>
-          <a:bodyPr/>
-          <a:p/>
-        </p:txBody>
       </p:sp>
       <p:sp>
         <p:nvSpPr>
@@ -5652,10 +5470,6 @@
           </a:solidFill>
           <a:ln/>
         </p:spPr>
-        <p:txBody>
-          <a:bodyPr/>
-          <a:p/>
-        </p:txBody>
       </p:sp>
       <p:sp>
         <p:nvSpPr>
@@ -5917,10 +5731,6 @@
             <a:prstDash val="solid"/>
           </a:ln>
         </p:spPr>
-        <p:txBody>
-          <a:bodyPr/>
-          <a:p/>
-        </p:txBody>
       </p:sp>
       <p:sp>
         <p:nvSpPr>
@@ -5941,10 +5751,6 @@
           </a:solidFill>
           <a:ln/>
         </p:spPr>
-        <p:txBody>
-          <a:bodyPr/>
-          <a:p/>
-        </p:txBody>
       </p:sp>
       <p:sp>
         <p:nvSpPr>
@@ -6206,10 +6012,6 @@
             <a:prstDash val="solid"/>
           </a:ln>
         </p:spPr>
-        <p:txBody>
-          <a:bodyPr/>
-          <a:p/>
-        </p:txBody>
       </p:sp>
       <p:sp>
         <p:nvSpPr>
@@ -6230,10 +6032,6 @@
           </a:solidFill>
           <a:ln/>
         </p:spPr>
-        <p:txBody>
-          <a:bodyPr/>
-          <a:p/>
-        </p:txBody>
       </p:sp>
       <p:sp>
         <p:nvSpPr>
@@ -7712,11 +7510,11 @@
         <p:spPr>
           <a:xfrm>
             <a:off x="457200" y="1371600"/>
-            <a:ext cx="2743200" cy="2286000"/>
+            <a:ext cx="2743200" cy="2194560"/>
           </a:xfrm>
           <a:prstGeom prst="roundRect">
             <a:avLst>
-              <a:gd name="adj" fmla="val 4000"/>
+              <a:gd name="adj" fmla="val 4167"/>
             </a:avLst>
           </a:prstGeom>
           <a:solidFill>
@@ -7729,10 +7527,6 @@
             <a:prstDash val="solid"/>
           </a:ln>
         </p:spPr>
-        <p:txBody>
-          <a:bodyPr/>
-          <a:p/>
-        </p:txBody>
       </p:sp>
       <p:sp>
         <p:nvSpPr>
@@ -7742,7 +7536,7 @@
         </p:nvSpPr>
         <p:spPr>
           <a:xfrm>
-            <a:off x="594360" y="1645920"/>
+            <a:off x="594360" y="1627632"/>
             <a:ext cx="2468880" cy="731520"/>
           </a:xfrm>
           <a:prstGeom prst="rect">
@@ -7759,17 +7553,17 @@
               <a:buNone/>
             </a:pPr>
             <a:r>
-              <a:rPr lang="en-US" sz="3600" b="1" dirty="0">
-                <a:solidFill>
-                  <a:srgbClr val="14B8A6"/>
-                </a:solidFill>
-                <a:latin typeface="Noto Sans CJK SC" pitchFamily="34" charset="0"/>
-                <a:ea typeface="Noto Sans CJK SC" pitchFamily="34" charset="-122"/>
-                <a:cs typeface="Noto Sans CJK SC" pitchFamily="34" charset="-120"/>
-              </a:rPr>
-              <a:t>70</a:t>
-            </a:r>
-            <a:endParaRPr lang="en-US" sz="3600" dirty="0"/>
+              <a:rPr lang="en-US" sz="3400" b="1" dirty="0">
+                <a:solidFill>
+                  <a:srgbClr val="34D399"/>
+                </a:solidFill>
+                <a:latin typeface="Noto Sans CJK SC" pitchFamily="34" charset="0"/>
+                <a:ea typeface="Noto Sans CJK SC" pitchFamily="34" charset="-122"/>
+                <a:cs typeface="Noto Sans CJK SC" pitchFamily="34" charset="-120"/>
+              </a:rPr>
+              <a:t>98.4%</a:t>
+            </a:r>
+            <a:endParaRPr lang="en-US" sz="3400" dirty="0"/>
           </a:p>
         </p:txBody>
       </p:sp>
@@ -7781,8 +7575,8 @@
         </p:nvSpPr>
         <p:spPr>
           <a:xfrm>
-            <a:off x="594360" y="2468880"/>
-            <a:ext cx="2468880" cy="365760"/>
+            <a:off x="594360" y="2395728"/>
+            <a:ext cx="2468880" cy="329184"/>
           </a:xfrm>
           <a:prstGeom prst="rect">
             <a:avLst/>
@@ -7798,7 +7592,7 @@
               <a:buNone/>
             </a:pPr>
             <a:r>
-              <a:rPr lang="en-US" sz="1400" b="1" dirty="0">
+              <a:rPr lang="en-US" sz="1350" b="1" dirty="0">
                 <a:solidFill>
                   <a:srgbClr val="FFFFFF"/>
                 </a:solidFill>
@@ -7806,9 +7600,9 @@
                 <a:ea typeface="Noto Sans CJK SC" pitchFamily="34" charset="-122"/>
                 <a:cs typeface="Noto Sans CJK SC" pitchFamily="34" charset="-120"/>
               </a:rPr>
-              <a:t>评测集 v0 条数</a:t>
-            </a:r>
-            <a:endParaRPr lang="en-US" sz="1400" dirty="0"/>
+              <a:t>应拦拦截率</a:t>
+            </a:r>
+            <a:endParaRPr lang="en-US" sz="1350" dirty="0"/>
           </a:p>
         </p:txBody>
       </p:sp>
@@ -7820,8 +7614,8 @@
         </p:nvSpPr>
         <p:spPr>
           <a:xfrm>
-            <a:off x="594360" y="2926080"/>
-            <a:ext cx="2468880" cy="320040"/>
+            <a:off x="594360" y="2798064"/>
+            <a:ext cx="2468880" cy="292608"/>
           </a:xfrm>
           <a:prstGeom prst="rect">
             <a:avLst/>
@@ -7837,7 +7631,7 @@
               <a:buNone/>
             </a:pPr>
             <a:r>
-              <a:rPr lang="en-US" sz="1200" dirty="0">
+              <a:rPr lang="en-US" sz="1050" dirty="0">
                 <a:solidFill>
                   <a:srgbClr val="94A3B8"/>
                 </a:solidFill>
@@ -7845,9 +7639,9 @@
                 <a:ea typeface="Noto Sans CJK SC" pitchFamily="34" charset="-122"/>
                 <a:cs typeface="Noto Sans CJK SC" pitchFamily="34" charset="-120"/>
               </a:rPr>
-              <a:t>W/T/X/A</a:t>
-            </a:r>
-            <a:endParaRPr lang="en-US" sz="1200" dirty="0"/>
+              <a:t>123/125 · 目标 ≥90%</a:t>
+            </a:r>
+            <a:endParaRPr lang="en-US" sz="1050" dirty="0"/>
           </a:p>
         </p:txBody>
       </p:sp>
@@ -7860,11 +7654,11 @@
         <p:spPr>
           <a:xfrm>
             <a:off x="3337560" y="1371600"/>
-            <a:ext cx="2743200" cy="2286000"/>
+            <a:ext cx="2743200" cy="2194560"/>
           </a:xfrm>
           <a:prstGeom prst="roundRect">
             <a:avLst>
-              <a:gd name="adj" fmla="val 4000"/>
+              <a:gd name="adj" fmla="val 4167"/>
             </a:avLst>
           </a:prstGeom>
           <a:solidFill>
@@ -7877,10 +7671,6 @@
             <a:prstDash val="solid"/>
           </a:ln>
         </p:spPr>
-        <p:txBody>
-          <a:bodyPr/>
-          <a:p/>
-        </p:txBody>
       </p:sp>
       <p:sp>
         <p:nvSpPr>
@@ -7890,7 +7680,7 @@
         </p:nvSpPr>
         <p:spPr>
           <a:xfrm>
-            <a:off x="3474720" y="1645920"/>
+            <a:off x="3474720" y="1627632"/>
             <a:ext cx="2468880" cy="731520"/>
           </a:xfrm>
           <a:prstGeom prst="rect">
@@ -7907,9 +7697,9 @@
               <a:buNone/>
             </a:pPr>
             <a:r>
-              <a:rPr lang="en-US" sz="3600" b="1" dirty="0">
-                <a:solidFill>
-                  <a:srgbClr val="14B8A6"/>
+              <a:rPr lang="en-US" sz="3400" b="1" dirty="0">
+                <a:solidFill>
+                  <a:srgbClr val="34D399"/>
                 </a:solidFill>
                 <a:latin typeface="Noto Sans CJK SC" pitchFamily="34" charset="0"/>
                 <a:ea typeface="Noto Sans CJK SC" pitchFamily="34" charset="-122"/>
@@ -7917,7 +7707,7 @@
               </a:rPr>
               <a:t>0%</a:t>
             </a:r>
-            <a:endParaRPr lang="en-US" sz="3600" dirty="0"/>
+            <a:endParaRPr lang="en-US" sz="3400" dirty="0"/>
           </a:p>
         </p:txBody>
       </p:sp>
@@ -7929,8 +7719,8 @@
         </p:nvSpPr>
         <p:spPr>
           <a:xfrm>
-            <a:off x="3474720" y="2468880"/>
-            <a:ext cx="2468880" cy="365760"/>
+            <a:off x="3474720" y="2395728"/>
+            <a:ext cx="2468880" cy="329184"/>
           </a:xfrm>
           <a:prstGeom prst="rect">
             <a:avLst/>
@@ -7946,7 +7736,7 @@
               <a:buNone/>
             </a:pPr>
             <a:r>
-              <a:rPr lang="en-US" sz="1400" b="1" dirty="0">
+              <a:rPr lang="en-US" sz="1350" b="1" dirty="0">
                 <a:solidFill>
                   <a:srgbClr val="FFFFFF"/>
                 </a:solidFill>
@@ -7954,9 +7744,9 @@
                 <a:ea typeface="Noto Sans CJK SC" pitchFamily="34" charset="-122"/>
                 <a:cs typeface="Noto Sans CJK SC" pitchFamily="34" charset="-120"/>
               </a:rPr>
-              <a:t>误拦率</a:t>
-            </a:r>
-            <a:endParaRPr lang="en-US" sz="1400" dirty="0"/>
+              <a:t>注入逃逸率</a:t>
+            </a:r>
+            <a:endParaRPr lang="en-US" sz="1350" dirty="0"/>
           </a:p>
         </p:txBody>
       </p:sp>
@@ -7968,8 +7758,8 @@
         </p:nvSpPr>
         <p:spPr>
           <a:xfrm>
-            <a:off x="3474720" y="2926080"/>
-            <a:ext cx="2468880" cy="320040"/>
+            <a:off x="3474720" y="2798064"/>
+            <a:ext cx="2468880" cy="292608"/>
           </a:xfrm>
           <a:prstGeom prst="rect">
             <a:avLst/>
@@ -7985,7 +7775,7 @@
               <a:buNone/>
             </a:pPr>
             <a:r>
-              <a:rPr lang="en-US" sz="1200" dirty="0">
+              <a:rPr lang="en-US" sz="1050" dirty="0">
                 <a:solidFill>
                   <a:srgbClr val="94A3B8"/>
                 </a:solidFill>
@@ -7993,9 +7783,9 @@
                 <a:ea typeface="Noto Sans CJK SC" pitchFamily="34" charset="-122"/>
                 <a:cs typeface="Noto Sans CJK SC" pitchFamily="34" charset="-120"/>
               </a:rPr>
-              <a:t>该放的没被拦</a:t>
-            </a:r>
-            <a:endParaRPr lang="en-US" sz="1200" dirty="0"/>
+              <a:t>0/45 · 目标 ≤20%</a:t>
+            </a:r>
+            <a:endParaRPr lang="en-US" sz="1050" dirty="0"/>
           </a:p>
         </p:txBody>
       </p:sp>
@@ -8008,11 +7798,11 @@
         <p:spPr>
           <a:xfrm>
             <a:off x="6217920" y="1371600"/>
-            <a:ext cx="2743200" cy="2286000"/>
+            <a:ext cx="2743200" cy="2194560"/>
           </a:xfrm>
           <a:prstGeom prst="roundRect">
             <a:avLst>
-              <a:gd name="adj" fmla="val 4000"/>
+              <a:gd name="adj" fmla="val 4167"/>
             </a:avLst>
           </a:prstGeom>
           <a:solidFill>
@@ -8025,10 +7815,6 @@
             <a:prstDash val="solid"/>
           </a:ln>
         </p:spPr>
-        <p:txBody>
-          <a:bodyPr/>
-          <a:p/>
-        </p:txBody>
       </p:sp>
       <p:sp>
         <p:nvSpPr>
@@ -8038,7 +7824,7 @@
         </p:nvSpPr>
         <p:spPr>
           <a:xfrm>
-            <a:off x="6355080" y="1645920"/>
+            <a:off x="6355080" y="1627632"/>
             <a:ext cx="2468880" cy="731520"/>
           </a:xfrm>
           <a:prstGeom prst="rect">
@@ -8055,17 +7841,17 @@
               <a:buNone/>
             </a:pPr>
             <a:r>
-              <a:rPr lang="en-US" sz="3600" b="1" dirty="0">
-                <a:solidFill>
-                  <a:srgbClr val="F59E0B"/>
-                </a:solidFill>
-                <a:latin typeface="Noto Sans CJK SC" pitchFamily="34" charset="0"/>
-                <a:ea typeface="Noto Sans CJK SC" pitchFamily="34" charset="-122"/>
-                <a:cs typeface="Noto Sans CJK SC" pitchFamily="34" charset="-120"/>
-              </a:rPr>
-              <a:t>41.9%</a:t>
-            </a:r>
-            <a:endParaRPr lang="en-US" sz="3600" dirty="0"/>
+              <a:rPr lang="en-US" sz="3400" b="1" dirty="0">
+                <a:solidFill>
+                  <a:srgbClr val="34D399"/>
+                </a:solidFill>
+                <a:latin typeface="Noto Sans CJK SC" pitchFamily="34" charset="0"/>
+                <a:ea typeface="Noto Sans CJK SC" pitchFamily="34" charset="-122"/>
+                <a:cs typeface="Noto Sans CJK SC" pitchFamily="34" charset="-120"/>
+              </a:rPr>
+              <a:t>2.2%</a:t>
+            </a:r>
+            <a:endParaRPr lang="en-US" sz="3400" dirty="0"/>
           </a:p>
         </p:txBody>
       </p:sp>
@@ -8077,8 +7863,8 @@
         </p:nvSpPr>
         <p:spPr>
           <a:xfrm>
-            <a:off x="6355080" y="2468880"/>
-            <a:ext cx="2468880" cy="365760"/>
+            <a:off x="6355080" y="2395728"/>
+            <a:ext cx="2468880" cy="329184"/>
           </a:xfrm>
           <a:prstGeom prst="rect">
             <a:avLst/>
@@ -8094,7 +7880,7 @@
               <a:buNone/>
             </a:pPr>
             <a:r>
-              <a:rPr lang="en-US" sz="1400" b="1" dirty="0">
+              <a:rPr lang="en-US" sz="1350" b="1" dirty="0">
                 <a:solidFill>
                   <a:srgbClr val="FFFFFF"/>
                 </a:solidFill>
@@ -8102,9 +7888,9 @@
                 <a:ea typeface="Noto Sans CJK SC" pitchFamily="34" charset="-122"/>
                 <a:cs typeface="Noto Sans CJK SC" pitchFamily="34" charset="-120"/>
               </a:rPr>
-              <a:t>应拦拦截率</a:t>
-            </a:r>
-            <a:endParaRPr lang="en-US" sz="1400" dirty="0"/>
+              <a:t>误拦率</a:t>
+            </a:r>
+            <a:endParaRPr lang="en-US" sz="1350" dirty="0"/>
           </a:p>
         </p:txBody>
       </p:sp>
@@ -8116,8 +7902,8 @@
         </p:nvSpPr>
         <p:spPr>
           <a:xfrm>
-            <a:off x="6355080" y="2926080"/>
-            <a:ext cx="2468880" cy="320040"/>
+            <a:off x="6355080" y="2798064"/>
+            <a:ext cx="2468880" cy="292608"/>
           </a:xfrm>
           <a:prstGeom prst="rect">
             <a:avLst/>
@@ -8133,7 +7919,7 @@
               <a:buNone/>
             </a:pPr>
             <a:r>
-              <a:rPr lang="en-US" sz="1200" dirty="0">
+              <a:rPr lang="en-US" sz="1050" dirty="0">
                 <a:solidFill>
                   <a:srgbClr val="94A3B8"/>
                 </a:solidFill>
@@ -8141,9 +7927,9 @@
                 <a:ea typeface="Noto Sans CJK SC" pitchFamily="34" charset="-122"/>
                 <a:cs typeface="Noto Sans CJK SC" pitchFamily="34" charset="-120"/>
               </a:rPr>
-              <a:t>W1 主攻</a:t>
-            </a:r>
-            <a:endParaRPr lang="en-US" sz="1200" dirty="0"/>
+              <a:t>1/46 · 目标 ≤5%</a:t>
+            </a:r>
+            <a:endParaRPr lang="en-US" sz="1050" dirty="0"/>
           </a:p>
         </p:txBody>
       </p:sp>
@@ -8156,11 +7942,11 @@
         <p:spPr>
           <a:xfrm>
             <a:off x="9098280" y="1371600"/>
-            <a:ext cx="2743200" cy="2286000"/>
+            <a:ext cx="2743200" cy="2194560"/>
           </a:xfrm>
           <a:prstGeom prst="roundRect">
             <a:avLst>
-              <a:gd name="adj" fmla="val 4000"/>
+              <a:gd name="adj" fmla="val 4167"/>
             </a:avLst>
           </a:prstGeom>
           <a:solidFill>
@@ -8173,10 +7959,6 @@
             <a:prstDash val="solid"/>
           </a:ln>
         </p:spPr>
-        <p:txBody>
-          <a:bodyPr/>
-          <a:p/>
-        </p:txBody>
       </p:sp>
       <p:sp>
         <p:nvSpPr>
@@ -8186,7 +7968,7 @@
         </p:nvSpPr>
         <p:spPr>
           <a:xfrm>
-            <a:off x="9235440" y="1645920"/>
+            <a:off x="9235440" y="1627632"/>
             <a:ext cx="2468880" cy="731520"/>
           </a:xfrm>
           <a:prstGeom prst="rect">
@@ -8203,17 +7985,17 @@
               <a:buNone/>
             </a:pPr>
             <a:r>
-              <a:rPr lang="en-US" sz="3600" b="1" dirty="0">
-                <a:solidFill>
-                  <a:srgbClr val="F59E0B"/>
-                </a:solidFill>
-                <a:latin typeface="Noto Sans CJK SC" pitchFamily="34" charset="0"/>
-                <a:ea typeface="Noto Sans CJK SC" pitchFamily="34" charset="-122"/>
-                <a:cs typeface="Noto Sans CJK SC" pitchFamily="34" charset="-120"/>
-              </a:rPr>
-              <a:t>58.8%</a:t>
-            </a:r>
-            <a:endParaRPr lang="en-US" sz="3600" dirty="0"/>
+              <a:rPr lang="en-US" sz="3400" b="1" dirty="0">
+                <a:solidFill>
+                  <a:srgbClr val="34D399"/>
+                </a:solidFill>
+                <a:latin typeface="Noto Sans CJK SC" pitchFamily="34" charset="0"/>
+                <a:ea typeface="Noto Sans CJK SC" pitchFamily="34" charset="-122"/>
+                <a:cs typeface="Noto Sans CJK SC" pitchFamily="34" charset="-120"/>
+              </a:rPr>
+              <a:t>97.1%</a:t>
+            </a:r>
+            <a:endParaRPr lang="en-US" sz="3400" dirty="0"/>
           </a:p>
         </p:txBody>
       </p:sp>
@@ -8225,8 +8007,8 @@
         </p:nvSpPr>
         <p:spPr>
           <a:xfrm>
-            <a:off x="9235440" y="2468880"/>
-            <a:ext cx="2468880" cy="365760"/>
+            <a:off x="9235440" y="2395728"/>
+            <a:ext cx="2468880" cy="329184"/>
           </a:xfrm>
           <a:prstGeom prst="rect">
             <a:avLst/>
@@ -8242,7 +8024,7 @@
               <a:buNone/>
             </a:pPr>
             <a:r>
-              <a:rPr lang="en-US" sz="1400" b="1" dirty="0">
+              <a:rPr lang="en-US" sz="1350" b="1" dirty="0">
                 <a:solidFill>
                   <a:srgbClr val="FFFFFF"/>
                 </a:solidFill>
@@ -8250,9 +8032,9 @@
                 <a:ea typeface="Noto Sans CJK SC" pitchFamily="34" charset="-122"/>
                 <a:cs typeface="Noto Sans CJK SC" pitchFamily="34" charset="-120"/>
               </a:rPr>
-              <a:t>注入逃逸率</a:t>
-            </a:r>
-            <a:endParaRPr lang="en-US" sz="1400" dirty="0"/>
+              <a:t>评测集通过率</a:t>
+            </a:r>
+            <a:endParaRPr lang="en-US" sz="1350" dirty="0"/>
           </a:p>
         </p:txBody>
       </p:sp>
@@ -8264,8 +8046,8 @@
         </p:nvSpPr>
         <p:spPr>
           <a:xfrm>
-            <a:off x="9235440" y="2926080"/>
-            <a:ext cx="2468880" cy="320040"/>
+            <a:off x="9235440" y="2798064"/>
+            <a:ext cx="2468880" cy="292608"/>
           </a:xfrm>
           <a:prstGeom prst="rect">
             <a:avLst/>
@@ -8281,7 +8063,7 @@
               <a:buNone/>
             </a:pPr>
             <a:r>
-              <a:rPr lang="en-US" sz="1200" dirty="0">
+              <a:rPr lang="en-US" sz="1050" dirty="0">
                 <a:solidFill>
                   <a:srgbClr val="94A3B8"/>
                 </a:solidFill>
@@ -8289,9 +8071,9 @@
                 <a:ea typeface="Noto Sans CJK SC" pitchFamily="34" charset="-122"/>
                 <a:cs typeface="Noto Sans CJK SC" pitchFamily="34" charset="-120"/>
               </a:rPr>
-              <a:t>越低越好 · W1</a:t>
-            </a:r>
-            <a:endParaRPr lang="en-US" sz="1200" dirty="0"/>
+              <a:t>168/173 · 另 2 条 SKIP</a:t>
+            </a:r>
+            <a:endParaRPr lang="en-US" sz="1050" dirty="0"/>
           </a:p>
         </p:txBody>
       </p:sp>
@@ -8303,12 +8085,12 @@
         </p:nvSpPr>
         <p:spPr>
           <a:xfrm>
-            <a:off x="457200" y="3931920"/>
-            <a:ext cx="11247120" cy="1920240"/>
+            <a:off x="457200" y="3840480"/>
+            <a:ext cx="11247120" cy="2011680"/>
           </a:xfrm>
           <a:prstGeom prst="roundRect">
             <a:avLst>
-              <a:gd name="adj" fmla="val 4762"/>
+              <a:gd name="adj" fmla="val 4545"/>
             </a:avLst>
           </a:prstGeom>
           <a:solidFill>
@@ -8321,10 +8103,6 @@
             <a:prstDash val="solid"/>
           </a:ln>
         </p:spPr>
-        <p:txBody>
-          <a:bodyPr/>
-          <a:p/>
-        </p:txBody>
       </p:sp>
       <p:sp>
         <p:nvSpPr>
@@ -8334,8 +8112,125 @@
         </p:nvSpPr>
         <p:spPr>
           <a:xfrm>
-            <a:off x="685800" y="4114800"/>
-            <a:ext cx="3657600" cy="320040"/>
+            <a:off x="685800" y="3950208"/>
+            <a:ext cx="7315200" cy="274320"/>
+          </a:xfrm>
+          <a:prstGeom prst="rect">
+            <a:avLst/>
+          </a:prstGeom>
+          <a:noFill/>
+          <a:ln/>
+        </p:spPr>
+        <p:txBody>
+          <a:bodyPr wrap="square" lIns="0" tIns="0" rIns="0" bIns="0" rtlCol="0" anchor="ctr"/>
+          <a:lstStyle/>
+          <a:p>
+            <a:pPr indent="0" marL="0">
+              <a:buNone/>
+            </a:pPr>
+            <a:r>
+              <a:rPr lang="en-US" sz="1250" b="1" dirty="0">
+                <a:solidFill>
+                  <a:srgbClr val="38BDF8"/>
+                </a:solidFill>
+                <a:latin typeface="Noto Sans CJK SC" pitchFamily="34" charset="0"/>
+                <a:ea typeface="Noto Sans CJK SC" pitchFamily="34" charset="-122"/>
+                <a:cs typeface="Noto Sans CJK SC" pitchFamily="34" charset="-120"/>
+              </a:rPr>
+              <a:t>24 小时内做了什么（同一台机、同一命令、真跑）</a:t>
+            </a:r>
+            <a:endParaRPr lang="en-US" sz="1250" dirty="0"/>
+          </a:p>
+        </p:txBody>
+      </p:sp>
+      <p:sp>
+        <p:nvSpPr>
+          <p:cNvPr id="22" name="Text 20"/>
+          <p:cNvSpPr/>
+          <p:nvPr/>
+        </p:nvSpPr>
+        <p:spPr>
+          <a:xfrm>
+            <a:off x="685800" y="4334256"/>
+            <a:ext cx="2651760" cy="219456"/>
+          </a:xfrm>
+          <a:prstGeom prst="rect">
+            <a:avLst/>
+          </a:prstGeom>
+          <a:noFill/>
+          <a:ln/>
+        </p:spPr>
+        <p:txBody>
+          <a:bodyPr wrap="square" lIns="0" tIns="0" rIns="0" bIns="0" rtlCol="0" anchor="ctr"/>
+          <a:lstStyle/>
+          <a:p>
+            <a:pPr indent="0" marL="0">
+              <a:buNone/>
+            </a:pPr>
+            <a:r>
+              <a:rPr lang="en-US" sz="1050" dirty="0">
+                <a:solidFill>
+                  <a:srgbClr val="94A3B8"/>
+                </a:solidFill>
+                <a:latin typeface="Noto Sans CJK SC" pitchFamily="34" charset="0"/>
+                <a:ea typeface="Noto Sans CJK SC" pitchFamily="34" charset="-122"/>
+                <a:cs typeface="Noto Sans CJK SC" pitchFamily="34" charset="-120"/>
+              </a:rPr>
+              <a:t>评测集 P / F</a:t>
+            </a:r>
+            <a:endParaRPr lang="en-US" sz="1050" dirty="0"/>
+          </a:p>
+        </p:txBody>
+      </p:sp>
+      <p:sp>
+        <p:nvSpPr>
+          <p:cNvPr id="23" name="Text 21"/>
+          <p:cNvSpPr/>
+          <p:nvPr/>
+        </p:nvSpPr>
+        <p:spPr>
+          <a:xfrm>
+            <a:off x="685800" y="4572000"/>
+            <a:ext cx="2651760" cy="219456"/>
+          </a:xfrm>
+          <a:prstGeom prst="rect">
+            <a:avLst/>
+          </a:prstGeom>
+          <a:noFill/>
+          <a:ln/>
+        </p:spPr>
+        <p:txBody>
+          <a:bodyPr wrap="square" lIns="0" tIns="0" rIns="0" bIns="0" rtlCol="0" anchor="ctr"/>
+          <a:lstStyle/>
+          <a:p>
+            <a:pPr indent="0" marL="0">
+              <a:buNone/>
+            </a:pPr>
+            <a:r>
+              <a:rPr lang="en-US" sz="1100" dirty="0">
+                <a:solidFill>
+                  <a:srgbClr val="94A3B8"/>
+                </a:solidFill>
+                <a:latin typeface="Noto Sans CJK SC" pitchFamily="34" charset="0"/>
+                <a:ea typeface="Noto Sans CJK SC" pitchFamily="34" charset="-122"/>
+                <a:cs typeface="Noto Sans CJK SC" pitchFamily="34" charset="-120"/>
+              </a:rPr>
+              <a:t>P142 / F29</a:t>
+            </a:r>
+            <a:endParaRPr lang="en-US" sz="1100" dirty="0"/>
+          </a:p>
+        </p:txBody>
+      </p:sp>
+      <p:sp>
+        <p:nvSpPr>
+          <p:cNvPr id="24" name="Text 22"/>
+          <p:cNvSpPr/>
+          <p:nvPr/>
+        </p:nvSpPr>
+        <p:spPr>
+          <a:xfrm>
+            <a:off x="685800" y="4828032"/>
+            <a:ext cx="2651760" cy="274320"/>
           </a:xfrm>
           <a:prstGeom prst="rect">
             <a:avLst/>
@@ -8353,13 +8248,13 @@
             <a:r>
               <a:rPr lang="en-US" sz="1400" b="1" dirty="0">
                 <a:solidFill>
-                  <a:srgbClr val="38BDF8"/>
-                </a:solidFill>
-                <a:latin typeface="Noto Sans CJK SC" pitchFamily="34" charset="0"/>
-                <a:ea typeface="Noto Sans CJK SC" pitchFamily="34" charset="-122"/>
-                <a:cs typeface="Noto Sans CJK SC" pitchFamily="34" charset="-120"/>
-              </a:rPr>
-              <a:t>W1 目标</a:t>
+                  <a:srgbClr val="34D399"/>
+                </a:solidFill>
+                <a:latin typeface="Noto Sans CJK SC" pitchFamily="34" charset="0"/>
+                <a:ea typeface="Noto Sans CJK SC" pitchFamily="34" charset="-122"/>
+                <a:cs typeface="Noto Sans CJK SC" pitchFamily="34" charset="-120"/>
+              </a:rPr>
+              <a:t>P168 / F3</a:t>
             </a:r>
             <a:endParaRPr lang="en-US" sz="1400" dirty="0"/>
           </a:p>
@@ -8367,55 +8262,233 @@
       </p:sp>
       <p:sp>
         <p:nvSpPr>
-          <p:cNvPr id="22" name="Text 20"/>
-          <p:cNvSpPr/>
-          <p:nvPr/>
-        </p:nvSpPr>
-        <p:spPr>
-          <a:xfrm>
-            <a:off x="685800" y="4572000"/>
-            <a:ext cx="10789920" cy="1005840"/>
-          </a:xfrm>
-          <a:prstGeom prst="rect">
-            <a:avLst/>
-          </a:prstGeom>
-          <a:noFill/>
-          <a:ln/>
-        </p:spPr>
-        <p:txBody>
-          <a:bodyPr wrap="square" lIns="0" tIns="0" rIns="0" bIns="0" rtlCol="0" anchor="ctr"/>
-          <a:lstStyle/>
-          <a:p>
-            <a:pPr indent="0" marL="0">
-              <a:buNone/>
-            </a:pPr>
-            <a:r>
-              <a:rPr lang="en-US" sz="1400" dirty="0">
-                <a:solidFill>
-                  <a:srgbClr val="E2E8F0"/>
-                </a:solidFill>
-                <a:latin typeface="Noto Sans CJK SC" pitchFamily="34" charset="0"/>
-                <a:ea typeface="Noto Sans CJK SC" pitchFamily="34" charset="-122"/>
-                <a:cs typeface="Noto Sans CJK SC" pitchFamily="34" charset="-120"/>
-              </a:rPr>
-              <a:t>应拦拦截率 ≥ 90%  ·  注入逃逸 ≤ 20%  ·  误拦 ≤ 5%  ·  评测集 ≥ 80 条</a:t>
+          <p:cNvPr id="25" name="Text 23"/>
+          <p:cNvSpPr/>
+          <p:nvPr/>
+        </p:nvSpPr>
+        <p:spPr>
+          <a:xfrm>
+            <a:off x="3474720" y="4334256"/>
+            <a:ext cx="2651760" cy="219456"/>
+          </a:xfrm>
+          <a:prstGeom prst="rect">
+            <a:avLst/>
+          </a:prstGeom>
+          <a:noFill/>
+          <a:ln/>
+        </p:spPr>
+        <p:txBody>
+          <a:bodyPr wrap="square" lIns="0" tIns="0" rIns="0" bIns="0" rtlCol="0" anchor="ctr"/>
+          <a:lstStyle/>
+          <a:p>
+            <a:pPr indent="0" marL="0">
+              <a:buNone/>
+            </a:pPr>
+            <a:r>
+              <a:rPr lang="en-US" sz="1050" dirty="0">
+                <a:solidFill>
+                  <a:srgbClr val="94A3B8"/>
+                </a:solidFill>
+                <a:latin typeface="Noto Sans CJK SC" pitchFamily="34" charset="0"/>
+                <a:ea typeface="Noto Sans CJK SC" pitchFamily="34" charset="-122"/>
+                <a:cs typeface="Noto Sans CJK SC" pitchFamily="34" charset="-120"/>
+              </a:rPr>
+              <a:t>注入逃逸率</a:t>
+            </a:r>
+            <a:endParaRPr lang="en-US" sz="1050" dirty="0"/>
+          </a:p>
+        </p:txBody>
+      </p:sp>
+      <p:sp>
+        <p:nvSpPr>
+          <p:cNvPr id="26" name="Text 24"/>
+          <p:cNvSpPr/>
+          <p:nvPr/>
+        </p:nvSpPr>
+        <p:spPr>
+          <a:xfrm>
+            <a:off x="3474720" y="4572000"/>
+            <a:ext cx="2651760" cy="219456"/>
+          </a:xfrm>
+          <a:prstGeom prst="rect">
+            <a:avLst/>
+          </a:prstGeom>
+          <a:noFill/>
+          <a:ln/>
+        </p:spPr>
+        <p:txBody>
+          <a:bodyPr wrap="square" lIns="0" tIns="0" rIns="0" bIns="0" rtlCol="0" anchor="ctr"/>
+          <a:lstStyle/>
+          <a:p>
+            <a:pPr indent="0" marL="0">
+              <a:buNone/>
+            </a:pPr>
+            <a:r>
+              <a:rPr lang="en-US" sz="1100" dirty="0">
+                <a:solidFill>
+                  <a:srgbClr val="94A3B8"/>
+                </a:solidFill>
+                <a:latin typeface="Noto Sans CJK SC" pitchFamily="34" charset="0"/>
+                <a:ea typeface="Noto Sans CJK SC" pitchFamily="34" charset="-122"/>
+                <a:cs typeface="Noto Sans CJK SC" pitchFamily="34" charset="-120"/>
+              </a:rPr>
+              <a:t>90.5%</a:t>
+            </a:r>
+            <a:endParaRPr lang="en-US" sz="1100" dirty="0"/>
+          </a:p>
+        </p:txBody>
+      </p:sp>
+      <p:sp>
+        <p:nvSpPr>
+          <p:cNvPr id="27" name="Text 25"/>
+          <p:cNvSpPr/>
+          <p:nvPr/>
+        </p:nvSpPr>
+        <p:spPr>
+          <a:xfrm>
+            <a:off x="3474720" y="4828032"/>
+            <a:ext cx="2651760" cy="274320"/>
+          </a:xfrm>
+          <a:prstGeom prst="rect">
+            <a:avLst/>
+          </a:prstGeom>
+          <a:noFill/>
+          <a:ln/>
+        </p:spPr>
+        <p:txBody>
+          <a:bodyPr wrap="square" lIns="0" tIns="0" rIns="0" bIns="0" rtlCol="0" anchor="ctr"/>
+          <a:lstStyle/>
+          <a:p>
+            <a:pPr indent="0" marL="0">
+              <a:buNone/>
+            </a:pPr>
+            <a:r>
+              <a:rPr lang="en-US" sz="1400" b="1" dirty="0">
+                <a:solidFill>
+                  <a:srgbClr val="34D399"/>
+                </a:solidFill>
+                <a:latin typeface="Noto Sans CJK SC" pitchFamily="34" charset="0"/>
+                <a:ea typeface="Noto Sans CJK SC" pitchFamily="34" charset="-122"/>
+                <a:cs typeface="Noto Sans CJK SC" pitchFamily="34" charset="-120"/>
+              </a:rPr>
+              <a:t>0%</a:t>
             </a:r>
             <a:endParaRPr lang="en-US" sz="1400" dirty="0"/>
           </a:p>
-          <a:p>
-            <a:pPr indent="0" marL="0">
-              <a:buNone/>
-            </a:pPr>
-            <a:r>
-              <a:rPr lang="en-US" sz="1400" dirty="0">
-                <a:solidFill>
-                  <a:srgbClr val="E2E8F0"/>
-                </a:solidFill>
-                <a:latin typeface="Noto Sans CJK SC" pitchFamily="34" charset="0"/>
-                <a:ea typeface="Noto Sans CJK SC" pitchFamily="34" charset="-122"/>
-                <a:cs typeface="Noto Sans CJK SC" pitchFamily="34" charset="-120"/>
-              </a:rPr>
-              <a:t>单测当前 128 passed  ·  对抗集 103 条真跑  ·  指标口径【待依灵确认】前不对外签章引用</a:t>
+        </p:txBody>
+      </p:sp>
+      <p:sp>
+        <p:nvSpPr>
+          <p:cNvPr id="28" name="Text 26"/>
+          <p:cNvSpPr/>
+          <p:nvPr/>
+        </p:nvSpPr>
+        <p:spPr>
+          <a:xfrm>
+            <a:off x="6263640" y="4334256"/>
+            <a:ext cx="2651760" cy="219456"/>
+          </a:xfrm>
+          <a:prstGeom prst="rect">
+            <a:avLst/>
+          </a:prstGeom>
+          <a:noFill/>
+          <a:ln/>
+        </p:spPr>
+        <p:txBody>
+          <a:bodyPr wrap="square" lIns="0" tIns="0" rIns="0" bIns="0" rtlCol="0" anchor="ctr"/>
+          <a:lstStyle/>
+          <a:p>
+            <a:pPr indent="0" marL="0">
+              <a:buNone/>
+            </a:pPr>
+            <a:r>
+              <a:rPr lang="en-US" sz="1050" dirty="0">
+                <a:solidFill>
+                  <a:srgbClr val="94A3B8"/>
+                </a:solidFill>
+                <a:latin typeface="Noto Sans CJK SC" pitchFamily="34" charset="0"/>
+                <a:ea typeface="Noto Sans CJK SC" pitchFamily="34" charset="-122"/>
+                <a:cs typeface="Noto Sans CJK SC" pitchFamily="34" charset="-120"/>
+              </a:rPr>
+              <a:t>横向越权拦截</a:t>
+            </a:r>
+            <a:endParaRPr lang="en-US" sz="1050" dirty="0"/>
+          </a:p>
+        </p:txBody>
+      </p:sp>
+      <p:sp>
+        <p:nvSpPr>
+          <p:cNvPr id="29" name="Text 27"/>
+          <p:cNvSpPr/>
+          <p:nvPr/>
+        </p:nvSpPr>
+        <p:spPr>
+          <a:xfrm>
+            <a:off x="6263640" y="4572000"/>
+            <a:ext cx="2651760" cy="219456"/>
+          </a:xfrm>
+          <a:prstGeom prst="rect">
+            <a:avLst/>
+          </a:prstGeom>
+          <a:noFill/>
+          <a:ln/>
+        </p:spPr>
+        <p:txBody>
+          <a:bodyPr wrap="square" lIns="0" tIns="0" rIns="0" bIns="0" rtlCol="0" anchor="ctr"/>
+          <a:lstStyle/>
+          <a:p>
+            <a:pPr indent="0" marL="0">
+              <a:buNone/>
+            </a:pPr>
+            <a:r>
+              <a:rPr lang="en-US" sz="1100" dirty="0">
+                <a:solidFill>
+                  <a:srgbClr val="94A3B8"/>
+                </a:solidFill>
+                <a:latin typeface="Noto Sans CJK SC" pitchFamily="34" charset="0"/>
+                <a:ea typeface="Noto Sans CJK SC" pitchFamily="34" charset="-122"/>
+                <a:cs typeface="Noto Sans CJK SC" pitchFamily="34" charset="-120"/>
+              </a:rPr>
+              <a:t>0 / 6</a:t>
+            </a:r>
+            <a:endParaRPr lang="en-US" sz="1100" dirty="0"/>
+          </a:p>
+        </p:txBody>
+      </p:sp>
+      <p:sp>
+        <p:nvSpPr>
+          <p:cNvPr id="30" name="Text 28"/>
+          <p:cNvSpPr/>
+          <p:nvPr/>
+        </p:nvSpPr>
+        <p:spPr>
+          <a:xfrm>
+            <a:off x="6263640" y="4828032"/>
+            <a:ext cx="2651760" cy="274320"/>
+          </a:xfrm>
+          <a:prstGeom prst="rect">
+            <a:avLst/>
+          </a:prstGeom>
+          <a:noFill/>
+          <a:ln/>
+        </p:spPr>
+        <p:txBody>
+          <a:bodyPr wrap="square" lIns="0" tIns="0" rIns="0" bIns="0" rtlCol="0" anchor="ctr"/>
+          <a:lstStyle/>
+          <a:p>
+            <a:pPr indent="0" marL="0">
+              <a:buNone/>
+            </a:pPr>
+            <a:r>
+              <a:rPr lang="en-US" sz="1400" b="1" dirty="0">
+                <a:solidFill>
+                  <a:srgbClr val="34D399"/>
+                </a:solidFill>
+                <a:latin typeface="Noto Sans CJK SC" pitchFamily="34" charset="0"/>
+                <a:ea typeface="Noto Sans CJK SC" pitchFamily="34" charset="-122"/>
+                <a:cs typeface="Noto Sans CJK SC" pitchFamily="34" charset="-120"/>
+              </a:rPr>
+              <a:t>6 / 6</a:t>
             </a:r>
             <a:endParaRPr lang="en-US" sz="1400" dirty="0"/>
           </a:p>
@@ -8423,7 +8496,163 @@
       </p:sp>
       <p:sp>
         <p:nvSpPr>
-          <p:cNvPr id="23" name="Text 21"/>
+          <p:cNvPr id="31" name="Text 29"/>
+          <p:cNvSpPr/>
+          <p:nvPr/>
+        </p:nvSpPr>
+        <p:spPr>
+          <a:xfrm>
+            <a:off x="9052560" y="4334256"/>
+            <a:ext cx="2651760" cy="219456"/>
+          </a:xfrm>
+          <a:prstGeom prst="rect">
+            <a:avLst/>
+          </a:prstGeom>
+          <a:noFill/>
+          <a:ln/>
+        </p:spPr>
+        <p:txBody>
+          <a:bodyPr wrap="square" lIns="0" tIns="0" rIns="0" bIns="0" rtlCol="0" anchor="ctr"/>
+          <a:lstStyle/>
+          <a:p>
+            <a:pPr indent="0" marL="0">
+              <a:buNone/>
+            </a:pPr>
+            <a:r>
+              <a:rPr lang="en-US" sz="1050" dirty="0">
+                <a:solidFill>
+                  <a:srgbClr val="94A3B8"/>
+                </a:solidFill>
+                <a:latin typeface="Noto Sans CJK SC" pitchFamily="34" charset="0"/>
+                <a:ea typeface="Noto Sans CJK SC" pitchFamily="34" charset="-122"/>
+                <a:cs typeface="Noto Sans CJK SC" pitchFamily="34" charset="-120"/>
+              </a:rPr>
+              <a:t>编码归一族</a:t>
+            </a:r>
+            <a:endParaRPr lang="en-US" sz="1050" dirty="0"/>
+          </a:p>
+        </p:txBody>
+      </p:sp>
+      <p:sp>
+        <p:nvSpPr>
+          <p:cNvPr id="32" name="Text 30"/>
+          <p:cNvSpPr/>
+          <p:nvPr/>
+        </p:nvSpPr>
+        <p:spPr>
+          <a:xfrm>
+            <a:off x="9052560" y="4572000"/>
+            <a:ext cx="2651760" cy="219456"/>
+          </a:xfrm>
+          <a:prstGeom prst="rect">
+            <a:avLst/>
+          </a:prstGeom>
+          <a:noFill/>
+          <a:ln/>
+        </p:spPr>
+        <p:txBody>
+          <a:bodyPr wrap="square" lIns="0" tIns="0" rIns="0" bIns="0" rtlCol="0" anchor="ctr"/>
+          <a:lstStyle/>
+          <a:p>
+            <a:pPr indent="0" marL="0">
+              <a:buNone/>
+            </a:pPr>
+            <a:r>
+              <a:rPr lang="en-US" sz="1100" dirty="0">
+                <a:solidFill>
+                  <a:srgbClr val="94A3B8"/>
+                </a:solidFill>
+                <a:latin typeface="Noto Sans CJK SC" pitchFamily="34" charset="0"/>
+                <a:ea typeface="Noto Sans CJK SC" pitchFamily="34" charset="-122"/>
+                <a:cs typeface="Noto Sans CJK SC" pitchFamily="34" charset="-120"/>
+              </a:rPr>
+              <a:t>3 / 12</a:t>
+            </a:r>
+            <a:endParaRPr lang="en-US" sz="1100" dirty="0"/>
+          </a:p>
+        </p:txBody>
+      </p:sp>
+      <p:sp>
+        <p:nvSpPr>
+          <p:cNvPr id="33" name="Text 31"/>
+          <p:cNvSpPr/>
+          <p:nvPr/>
+        </p:nvSpPr>
+        <p:spPr>
+          <a:xfrm>
+            <a:off x="9052560" y="4828032"/>
+            <a:ext cx="2651760" cy="274320"/>
+          </a:xfrm>
+          <a:prstGeom prst="rect">
+            <a:avLst/>
+          </a:prstGeom>
+          <a:noFill/>
+          <a:ln/>
+        </p:spPr>
+        <p:txBody>
+          <a:bodyPr wrap="square" lIns="0" tIns="0" rIns="0" bIns="0" rtlCol="0" anchor="ctr"/>
+          <a:lstStyle/>
+          <a:p>
+            <a:pPr indent="0" marL="0">
+              <a:buNone/>
+            </a:pPr>
+            <a:r>
+              <a:rPr lang="en-US" sz="1400" b="1" dirty="0">
+                <a:solidFill>
+                  <a:srgbClr val="34D399"/>
+                </a:solidFill>
+                <a:latin typeface="Noto Sans CJK SC" pitchFamily="34" charset="0"/>
+                <a:ea typeface="Noto Sans CJK SC" pitchFamily="34" charset="-122"/>
+                <a:cs typeface="Noto Sans CJK SC" pitchFamily="34" charset="-120"/>
+              </a:rPr>
+              <a:t>12 / 12</a:t>
+            </a:r>
+            <a:endParaRPr lang="en-US" sz="1400" dirty="0"/>
+          </a:p>
+        </p:txBody>
+      </p:sp>
+      <p:sp>
+        <p:nvSpPr>
+          <p:cNvPr id="34" name="Text 32"/>
+          <p:cNvSpPr/>
+          <p:nvPr/>
+        </p:nvSpPr>
+        <p:spPr>
+          <a:xfrm>
+            <a:off x="685800" y="5212080"/>
+            <a:ext cx="10881360" cy="384048"/>
+          </a:xfrm>
+          <a:prstGeom prst="rect">
+            <a:avLst/>
+          </a:prstGeom>
+          <a:noFill/>
+          <a:ln/>
+        </p:spPr>
+        <p:txBody>
+          <a:bodyPr wrap="square" lIns="0" tIns="0" rIns="0" bIns="0" rtlCol="0" anchor="ctr"/>
+          <a:lstStyle/>
+          <a:p>
+            <a:pPr indent="0" marL="0">
+              <a:buNone/>
+            </a:pPr>
+            <a:r>
+              <a:rPr lang="en-US" sz="950" dirty="0">
+                <a:solidFill>
+                  <a:srgbClr val="94A3B8"/>
+                </a:solidFill>
+                <a:latin typeface="Noto Sans CJK SC" pitchFamily="34" charset="0"/>
+                <a:ea typeface="Noto Sans CJK SC" pitchFamily="34" charset="-122"/>
+                <a:cs typeface="Noto Sans CJK SC" pitchFamily="34" charset="-120"/>
+              </a:rPr>
+              <a:t>单测 131 passed · 对抗集 108/111 · 仍失败 3 条逐条交底：E10/T23 属评测集口径冲突（E01「转 5000」期望放行、金额相同），B01 未指明改哪个订阅故先问清 · 指标口径【待依灵确认】前不对外签章引用</a:t>
+            </a:r>
+            <a:endParaRPr lang="en-US" sz="950" dirty="0"/>
+          </a:p>
+        </p:txBody>
+      </p:sp>
+      <p:sp>
+        <p:nvSpPr>
+          <p:cNvPr id="35" name="Text 33"/>
           <p:cNvSpPr/>
           <p:nvPr/>
         </p:nvSpPr>
@@ -8462,7 +8691,7 @@
       </p:sp>
       <p:sp>
         <p:nvSpPr>
-          <p:cNvPr id="24" name="Text 22"/>
+          <p:cNvPr id="36" name="Text 34"/>
           <p:cNvSpPr/>
           <p:nvPr/>
         </p:nvSpPr>
@@ -8695,12 +8924,12 @@
         </p:nvSpPr>
         <p:spPr>
           <a:xfrm>
-            <a:off x="457200" y="1737360"/>
-            <a:ext cx="5486400" cy="822960"/>
+            <a:off x="457200" y="1691640"/>
+            <a:ext cx="5486400" cy="786384"/>
           </a:xfrm>
           <a:prstGeom prst="roundRect">
             <a:avLst>
-              <a:gd name="adj" fmla="val 8889"/>
+              <a:gd name="adj" fmla="val 9302"/>
             </a:avLst>
           </a:prstGeom>
           <a:solidFill>
@@ -8713,10 +8942,6 @@
             <a:prstDash val="solid"/>
           </a:ln>
         </p:spPr>
-        <p:txBody>
-          <a:bodyPr/>
-          <a:p/>
-        </p:txBody>
       </p:sp>
       <p:sp>
         <p:nvSpPr>
@@ -8726,8 +8951,8 @@
         </p:nvSpPr>
         <p:spPr>
           <a:xfrm>
-            <a:off x="640080" y="1847088"/>
-            <a:ext cx="5120640" cy="274320"/>
+            <a:off x="640080" y="1783080"/>
+            <a:ext cx="5120640" cy="256032"/>
           </a:xfrm>
           <a:prstGeom prst="rect">
             <a:avLst/>
@@ -8765,8 +8990,8 @@
         </p:nvSpPr>
         <p:spPr>
           <a:xfrm>
-            <a:off x="640080" y="2148840"/>
-            <a:ext cx="5120640" cy="274320"/>
+            <a:off x="640080" y="2075688"/>
+            <a:ext cx="5120640" cy="256032"/>
           </a:xfrm>
           <a:prstGeom prst="rect">
             <a:avLst/>
@@ -8804,12 +9029,12 @@
         </p:nvSpPr>
         <p:spPr>
           <a:xfrm>
-            <a:off x="457200" y="2697480"/>
-            <a:ext cx="5486400" cy="822960"/>
+            <a:off x="457200" y="2587752"/>
+            <a:ext cx="5486400" cy="786384"/>
           </a:xfrm>
           <a:prstGeom prst="roundRect">
             <a:avLst>
-              <a:gd name="adj" fmla="val 8889"/>
+              <a:gd name="adj" fmla="val 9302"/>
             </a:avLst>
           </a:prstGeom>
           <a:solidFill>
@@ -8822,10 +9047,6 @@
             <a:prstDash val="solid"/>
           </a:ln>
         </p:spPr>
-        <p:txBody>
-          <a:bodyPr/>
-          <a:p/>
-        </p:txBody>
       </p:sp>
       <p:sp>
         <p:nvSpPr>
@@ -8835,8 +9056,8 @@
         </p:nvSpPr>
         <p:spPr>
           <a:xfrm>
-            <a:off x="640080" y="2807208"/>
-            <a:ext cx="5120640" cy="274320"/>
+            <a:off x="640080" y="2679192"/>
+            <a:ext cx="5120640" cy="256032"/>
           </a:xfrm>
           <a:prstGeom prst="rect">
             <a:avLst/>
@@ -8860,7 +9081,7 @@
                 <a:ea typeface="Noto Sans CJK SC" pitchFamily="34" charset="-122"/>
                 <a:cs typeface="Noto Sans CJK SC" pitchFamily="34" charset="-120"/>
               </a:rPr>
-              <a:t>授权范围</a:t>
+              <a:t>编码绕过</a:t>
             </a:r>
             <a:endParaRPr lang="en-US" sz="1400" dirty="0"/>
           </a:p>
@@ -8874,8 +9095,8 @@
         </p:nvSpPr>
         <p:spPr>
           <a:xfrm>
-            <a:off x="640080" y="3108960"/>
-            <a:ext cx="5120640" cy="274320"/>
+            <a:off x="640080" y="2971800"/>
+            <a:ext cx="5120640" cy="256032"/>
           </a:xfrm>
           <a:prstGeom prst="rect">
             <a:avLst/>
@@ -8899,7 +9120,7 @@
                 <a:ea typeface="Noto Sans CJK SC" pitchFamily="34" charset="-122"/>
                 <a:cs typeface="Noto Sans CJK SC" pitchFamily="34" charset="-120"/>
               </a:rPr>
-              <a:t>代客 / 横向 / 测评篡改一律拦</a:t>
+              <a:t>HTML 实体/URL/\uXXXX/base64/零宽/leetspeak 统一解码后匹配</a:t>
             </a:r>
             <a:endParaRPr lang="en-US" sz="1200" dirty="0"/>
           </a:p>
@@ -8913,12 +9134,12 @@
         </p:nvSpPr>
         <p:spPr>
           <a:xfrm>
-            <a:off x="457200" y="3657600"/>
-            <a:ext cx="5486400" cy="822960"/>
+            <a:off x="457200" y="3483864"/>
+            <a:ext cx="5486400" cy="786384"/>
           </a:xfrm>
           <a:prstGeom prst="roundRect">
             <a:avLst>
-              <a:gd name="adj" fmla="val 8889"/>
+              <a:gd name="adj" fmla="val 9302"/>
             </a:avLst>
           </a:prstGeom>
           <a:solidFill>
@@ -8931,10 +9152,6 @@
             <a:prstDash val="solid"/>
           </a:ln>
         </p:spPr>
-        <p:txBody>
-          <a:bodyPr/>
-          <a:p/>
-        </p:txBody>
       </p:sp>
       <p:sp>
         <p:nvSpPr>
@@ -8944,8 +9161,8 @@
         </p:nvSpPr>
         <p:spPr>
           <a:xfrm>
-            <a:off x="640080" y="3767328"/>
-            <a:ext cx="5120640" cy="274320"/>
+            <a:off x="640080" y="3575304"/>
+            <a:ext cx="5120640" cy="256032"/>
           </a:xfrm>
           <a:prstGeom prst="rect">
             <a:avLst/>
@@ -8969,7 +9186,7 @@
                 <a:ea typeface="Noto Sans CJK SC" pitchFamily="34" charset="-122"/>
                 <a:cs typeface="Noto Sans CJK SC" pitchFamily="34" charset="-120"/>
               </a:rPr>
-              <a:t>目录硬约束</a:t>
+              <a:t>授权范围</a:t>
             </a:r>
             <a:endParaRPr lang="en-US" sz="1400" dirty="0"/>
           </a:p>
@@ -8983,8 +9200,8 @@
         </p:nvSpPr>
         <p:spPr>
           <a:xfrm>
-            <a:off x="640080" y="4069080"/>
-            <a:ext cx="5120640" cy="274320"/>
+            <a:off x="640080" y="3867912"/>
+            <a:ext cx="5120640" cy="256032"/>
           </a:xfrm>
           <a:prstGeom prst="rect">
             <a:avLst/>
@@ -9008,7 +9225,7 @@
                 <a:ea typeface="Noto Sans CJK SC" pitchFamily="34" charset="-122"/>
                 <a:cs typeface="Noto Sans CJK SC" pitchFamily="34" charset="-120"/>
               </a:rPr>
-              <a:t>未知品名 block，禁止静默近名替换</a:t>
+              <a:t>代客 / 横向 / 测评篡改一律拦</a:t>
             </a:r>
             <a:endParaRPr lang="en-US" sz="1200" dirty="0"/>
           </a:p>
@@ -9022,12 +9239,12 @@
         </p:nvSpPr>
         <p:spPr>
           <a:xfrm>
-            <a:off x="457200" y="4617720"/>
-            <a:ext cx="5486400" cy="822960"/>
+            <a:off x="457200" y="4379976"/>
+            <a:ext cx="5486400" cy="786384"/>
           </a:xfrm>
           <a:prstGeom prst="roundRect">
             <a:avLst>
-              <a:gd name="adj" fmla="val 8889"/>
+              <a:gd name="adj" fmla="val 9302"/>
             </a:avLst>
           </a:prstGeom>
           <a:solidFill>
@@ -9040,10 +9257,6 @@
             <a:prstDash val="solid"/>
           </a:ln>
         </p:spPr>
-        <p:txBody>
-          <a:bodyPr/>
-          <a:p/>
-        </p:txBody>
       </p:sp>
       <p:sp>
         <p:nvSpPr>
@@ -9053,8 +9266,8 @@
         </p:nvSpPr>
         <p:spPr>
           <a:xfrm>
-            <a:off x="640080" y="4727448"/>
-            <a:ext cx="5120640" cy="274320"/>
+            <a:off x="640080" y="4471416"/>
+            <a:ext cx="5120640" cy="256032"/>
           </a:xfrm>
           <a:prstGeom prst="rect">
             <a:avLst/>
@@ -9078,7 +9291,7 @@
                 <a:ea typeface="Noto Sans CJK SC" pitchFamily="34" charset="-122"/>
                 <a:cs typeface="Noto Sans CJK SC" pitchFamily="34" charset="-120"/>
               </a:rPr>
-              <a:t>话术归一</a:t>
+              <a:t>目录硬约束</a:t>
             </a:r>
             <a:endParaRPr lang="en-US" sz="1400" dirty="0"/>
           </a:p>
@@ -9092,8 +9305,8 @@
         </p:nvSpPr>
         <p:spPr>
           <a:xfrm>
-            <a:off x="640080" y="5029200"/>
-            <a:ext cx="5120640" cy="274320"/>
+            <a:off x="640080" y="4764024"/>
+            <a:ext cx="5120640" cy="256032"/>
           </a:xfrm>
           <a:prstGeom prst="rect">
             <a:avLst/>
@@ -9117,7 +9330,7 @@
                 <a:ea typeface="Noto Sans CJK SC" pitchFamily="34" charset="-122"/>
                 <a:cs typeface="Noto Sans CJK SC" pitchFamily="34" charset="-120"/>
               </a:rPr>
-              <a:t>同音变体防「保本」绕过</a:t>
+              <a:t>未知品名 block，禁止静默近名替换</a:t>
             </a:r>
             <a:endParaRPr lang="en-US" sz="1200" dirty="0"/>
           </a:p>
@@ -9131,12 +9344,12 @@
         </p:nvSpPr>
         <p:spPr>
           <a:xfrm>
-            <a:off x="6309360" y="1737360"/>
-            <a:ext cx="5394960" cy="822960"/>
+            <a:off x="457200" y="5276088"/>
+            <a:ext cx="5486400" cy="786384"/>
           </a:xfrm>
           <a:prstGeom prst="roundRect">
             <a:avLst>
-              <a:gd name="adj" fmla="val 8889"/>
+              <a:gd name="adj" fmla="val 9302"/>
             </a:avLst>
           </a:prstGeom>
           <a:solidFill>
@@ -9149,10 +9362,6 @@
             <a:prstDash val="solid"/>
           </a:ln>
         </p:spPr>
-        <p:txBody>
-          <a:bodyPr/>
-          <a:p/>
-        </p:txBody>
       </p:sp>
       <p:sp>
         <p:nvSpPr>
@@ -9162,8 +9371,8 @@
         </p:nvSpPr>
         <p:spPr>
           <a:xfrm>
-            <a:off x="6492240" y="1847088"/>
-            <a:ext cx="5029200" cy="274320"/>
+            <a:off x="640080" y="5367528"/>
+            <a:ext cx="5120640" cy="256032"/>
           </a:xfrm>
           <a:prstGeom prst="rect">
             <a:avLst/>
@@ -9187,7 +9396,7 @@
                 <a:ea typeface="Noto Sans CJK SC" pitchFamily="34" charset="-122"/>
                 <a:cs typeface="Noto Sans CJK SC" pitchFamily="34" charset="-120"/>
               </a:rPr>
-              <a:t>转账白名单</a:t>
+              <a:t>话术与澄清</a:t>
             </a:r>
             <a:endParaRPr lang="en-US" sz="1400" dirty="0"/>
           </a:p>
@@ -9201,8 +9410,8 @@
         </p:nvSpPr>
         <p:spPr>
           <a:xfrm>
-            <a:off x="6492240" y="2148840"/>
-            <a:ext cx="5029200" cy="274320"/>
+            <a:off x="640080" y="5660136"/>
+            <a:ext cx="5120640" cy="256032"/>
           </a:xfrm>
           <a:prstGeom prst="rect">
             <a:avLst/>
@@ -9226,7 +9435,7 @@
                 <a:ea typeface="Noto Sans CJK SC" pitchFamily="34" charset="-122"/>
                 <a:cs typeface="Noto Sans CJK SC" pitchFamily="34" charset="-120"/>
               </a:rPr>
-              <a:t>&gt;5 万非本人 → 403</a:t>
+              <a:t>同音变体防「保本」；房贷/梭哈/VIP 施压先澄清</a:t>
             </a:r>
             <a:endParaRPr lang="en-US" sz="1200" dirty="0"/>
           </a:p>
@@ -9240,12 +9449,12 @@
         </p:nvSpPr>
         <p:spPr>
           <a:xfrm>
-            <a:off x="6309360" y="2697480"/>
-            <a:ext cx="5394960" cy="822960"/>
+            <a:off x="6309360" y="1691640"/>
+            <a:ext cx="5394960" cy="786384"/>
           </a:xfrm>
           <a:prstGeom prst="roundRect">
             <a:avLst>
-              <a:gd name="adj" fmla="val 8889"/>
+              <a:gd name="adj" fmla="val 9302"/>
             </a:avLst>
           </a:prstGeom>
           <a:solidFill>
@@ -9258,10 +9467,6 @@
             <a:prstDash val="solid"/>
           </a:ln>
         </p:spPr>
-        <p:txBody>
-          <a:bodyPr/>
-          <a:p/>
-        </p:txBody>
       </p:sp>
       <p:sp>
         <p:nvSpPr>
@@ -9271,8 +9476,8 @@
         </p:nvSpPr>
         <p:spPr>
           <a:xfrm>
-            <a:off x="6492240" y="2807208"/>
-            <a:ext cx="5029200" cy="274320"/>
+            <a:off x="6492240" y="1783080"/>
+            <a:ext cx="5029200" cy="256032"/>
           </a:xfrm>
           <a:prstGeom prst="rect">
             <a:avLst/>
@@ -9296,7 +9501,7 @@
                 <a:ea typeface="Noto Sans CJK SC" pitchFamily="34" charset="-122"/>
                 <a:cs typeface="Noto Sans CJK SC" pitchFamily="34" charset="-120"/>
               </a:rPr>
-              <a:t>日累计软限</a:t>
+              <a:t>转账白名单</a:t>
             </a:r>
             <a:endParaRPr lang="en-US" sz="1400" dirty="0"/>
           </a:p>
@@ -9310,8 +9515,8 @@
         </p:nvSpPr>
         <p:spPr>
           <a:xfrm>
-            <a:off x="6492240" y="3108960"/>
-            <a:ext cx="5029200" cy="274320"/>
+            <a:off x="6492240" y="2075688"/>
+            <a:ext cx="5029200" cy="256032"/>
           </a:xfrm>
           <a:prstGeom prst="rect">
             <a:avLst/>
@@ -9335,7 +9540,7 @@
                 <a:ea typeface="Noto Sans CJK SC" pitchFamily="34" charset="-122"/>
                 <a:cs typeface="Noto Sans CJK SC" pitchFamily="34" charset="-120"/>
               </a:rPr>
-              <a:t>对外 &gt;2 万/日 → 403</a:t>
+              <a:t>&gt;5 万非本人 → 403</a:t>
             </a:r>
             <a:endParaRPr lang="en-US" sz="1200" dirty="0"/>
           </a:p>
@@ -9349,12 +9554,12 @@
         </p:nvSpPr>
         <p:spPr>
           <a:xfrm>
-            <a:off x="6309360" y="3657600"/>
-            <a:ext cx="5394960" cy="822960"/>
+            <a:off x="6309360" y="2587752"/>
+            <a:ext cx="5394960" cy="786384"/>
           </a:xfrm>
           <a:prstGeom prst="roundRect">
             <a:avLst>
-              <a:gd name="adj" fmla="val 8889"/>
+              <a:gd name="adj" fmla="val 9302"/>
             </a:avLst>
           </a:prstGeom>
           <a:solidFill>
@@ -9367,10 +9572,6 @@
             <a:prstDash val="solid"/>
           </a:ln>
         </p:spPr>
-        <p:txBody>
-          <a:bodyPr/>
-          <a:p/>
-        </p:txBody>
       </p:sp>
       <p:sp>
         <p:nvSpPr>
@@ -9380,8 +9581,8 @@
         </p:nvSpPr>
         <p:spPr>
           <a:xfrm>
-            <a:off x="6492240" y="3767328"/>
-            <a:ext cx="5029200" cy="274320"/>
+            <a:off x="6492240" y="2679192"/>
+            <a:ext cx="5029200" cy="256032"/>
           </a:xfrm>
           <a:prstGeom prst="rect">
             <a:avLst/>
@@ -9405,7 +9606,7 @@
                 <a:ea typeface="Noto Sans CJK SC" pitchFamily="34" charset="-122"/>
                 <a:cs typeface="Noto Sans CJK SC" pitchFamily="34" charset="-120"/>
               </a:rPr>
-              <a:t>申购适当性</a:t>
+              <a:t>日累计软限</a:t>
             </a:r>
             <a:endParaRPr lang="en-US" sz="1400" dirty="0"/>
           </a:p>
@@ -9419,8 +9620,8 @@
         </p:nvSpPr>
         <p:spPr>
           <a:xfrm>
-            <a:off x="6492240" y="4069080"/>
-            <a:ext cx="5029200" cy="274320"/>
+            <a:off x="6492240" y="2971800"/>
+            <a:ext cx="5029200" cy="256032"/>
           </a:xfrm>
           <a:prstGeom prst="rect">
             <a:avLst/>
@@ -9444,7 +9645,7 @@
                 <a:ea typeface="Noto Sans CJK SC" pitchFamily="34" charset="-122"/>
                 <a:cs typeface="Noto Sans CJK SC" pitchFamily="34" charset="-120"/>
               </a:rPr>
-              <a:t>risk_score 不足 → 403</a:t>
+              <a:t>对外 &gt;2 万/日 → 403</a:t>
             </a:r>
             <a:endParaRPr lang="en-US" sz="1200" dirty="0"/>
           </a:p>
@@ -9458,12 +9659,12 @@
         </p:nvSpPr>
         <p:spPr>
           <a:xfrm>
-            <a:off x="6309360" y="4617720"/>
-            <a:ext cx="5394960" cy="822960"/>
+            <a:off x="6309360" y="3483864"/>
+            <a:ext cx="5394960" cy="786384"/>
           </a:xfrm>
           <a:prstGeom prst="roundRect">
             <a:avLst>
-              <a:gd name="adj" fmla="val 8889"/>
+              <a:gd name="adj" fmla="val 9302"/>
             </a:avLst>
           </a:prstGeom>
           <a:solidFill>
@@ -9476,10 +9677,6 @@
             <a:prstDash val="solid"/>
           </a:ln>
         </p:spPr>
-        <p:txBody>
-          <a:bodyPr/>
-          <a:p/>
-        </p:txBody>
       </p:sp>
       <p:sp>
         <p:nvSpPr>
@@ -9489,8 +9686,8 @@
         </p:nvSpPr>
         <p:spPr>
           <a:xfrm>
-            <a:off x="6492240" y="4727448"/>
-            <a:ext cx="5029200" cy="274320"/>
+            <a:off x="6492240" y="3575304"/>
+            <a:ext cx="5029200" cy="256032"/>
           </a:xfrm>
           <a:prstGeom prst="rect">
             <a:avLst/>
@@ -9514,6 +9711,111 @@
                 <a:ea typeface="Noto Sans CJK SC" pitchFamily="34" charset="-122"/>
                 <a:cs typeface="Noto Sans CJK SC" pitchFamily="34" charset="-120"/>
               </a:rPr>
+              <a:t>申购适当性</a:t>
+            </a:r>
+            <a:endParaRPr lang="en-US" sz="1400" dirty="0"/>
+          </a:p>
+        </p:txBody>
+      </p:sp>
+      <p:sp>
+        <p:nvSpPr>
+          <p:cNvPr id="29" name="Text 27"/>
+          <p:cNvSpPr/>
+          <p:nvPr/>
+        </p:nvSpPr>
+        <p:spPr>
+          <a:xfrm>
+            <a:off x="6492240" y="3867912"/>
+            <a:ext cx="5029200" cy="256032"/>
+          </a:xfrm>
+          <a:prstGeom prst="rect">
+            <a:avLst/>
+          </a:prstGeom>
+          <a:noFill/>
+          <a:ln/>
+        </p:spPr>
+        <p:txBody>
+          <a:bodyPr wrap="square" lIns="0" tIns="0" rIns="0" bIns="0" rtlCol="0" anchor="ctr"/>
+          <a:lstStyle/>
+          <a:p>
+            <a:pPr indent="0" marL="0">
+              <a:buNone/>
+            </a:pPr>
+            <a:r>
+              <a:rPr lang="en-US" sz="1200" dirty="0">
+                <a:solidFill>
+                  <a:srgbClr val="94A3B8"/>
+                </a:solidFill>
+                <a:latin typeface="Noto Sans CJK SC" pitchFamily="34" charset="0"/>
+                <a:ea typeface="Noto Sans CJK SC" pitchFamily="34" charset="-122"/>
+                <a:cs typeface="Noto Sans CJK SC" pitchFamily="34" charset="-120"/>
+              </a:rPr>
+              <a:t>risk_score 不足 → 403</a:t>
+            </a:r>
+            <a:endParaRPr lang="en-US" sz="1200" dirty="0"/>
+          </a:p>
+        </p:txBody>
+      </p:sp>
+      <p:sp>
+        <p:nvSpPr>
+          <p:cNvPr id="30" name="Shape 28"/>
+          <p:cNvSpPr/>
+          <p:nvPr/>
+        </p:nvSpPr>
+        <p:spPr>
+          <a:xfrm>
+            <a:off x="6309360" y="4379976"/>
+            <a:ext cx="5394960" cy="786384"/>
+          </a:xfrm>
+          <a:prstGeom prst="roundRect">
+            <a:avLst>
+              <a:gd name="adj" fmla="val 9302"/>
+            </a:avLst>
+          </a:prstGeom>
+          <a:solidFill>
+            <a:srgbClr val="121A2B"/>
+          </a:solidFill>
+          <a:ln w="12700">
+            <a:solidFill>
+              <a:srgbClr val="1E293B"/>
+            </a:solidFill>
+            <a:prstDash val="solid"/>
+          </a:ln>
+        </p:spPr>
+      </p:sp>
+      <p:sp>
+        <p:nvSpPr>
+          <p:cNvPr id="31" name="Text 29"/>
+          <p:cNvSpPr/>
+          <p:nvPr/>
+        </p:nvSpPr>
+        <p:spPr>
+          <a:xfrm>
+            <a:off x="6492240" y="4471416"/>
+            <a:ext cx="5029200" cy="256032"/>
+          </a:xfrm>
+          <a:prstGeom prst="rect">
+            <a:avLst/>
+          </a:prstGeom>
+          <a:noFill/>
+          <a:ln/>
+        </p:spPr>
+        <p:txBody>
+          <a:bodyPr wrap="square" lIns="0" tIns="0" rIns="0" bIns="0" rtlCol="0" anchor="ctr"/>
+          <a:lstStyle/>
+          <a:p>
+            <a:pPr indent="0" marL="0">
+              <a:buNone/>
+            </a:pPr>
+            <a:r>
+              <a:rPr lang="en-US" sz="1400" b="1" dirty="0">
+                <a:solidFill>
+                  <a:srgbClr val="FFFFFF"/>
+                </a:solidFill>
+                <a:latin typeface="Noto Sans CJK SC" pitchFamily="34" charset="0"/>
+                <a:ea typeface="Noto Sans CJK SC" pitchFamily="34" charset="-122"/>
+                <a:cs typeface="Noto Sans CJK SC" pitchFamily="34" charset="-120"/>
+              </a:rPr>
               <a:t>密钥纪律</a:t>
             </a:r>
             <a:endParaRPr lang="en-US" sz="1400" dirty="0"/>
@@ -9522,14 +9824,14 @@
       </p:sp>
       <p:sp>
         <p:nvSpPr>
-          <p:cNvPr id="29" name="Text 27"/>
-          <p:cNvSpPr/>
-          <p:nvPr/>
-        </p:nvSpPr>
-        <p:spPr>
-          <a:xfrm>
-            <a:off x="6492240" y="5029200"/>
-            <a:ext cx="5029200" cy="274320"/>
+          <p:cNvPr id="32" name="Text 30"/>
+          <p:cNvSpPr/>
+          <p:nvPr/>
+        </p:nvSpPr>
+        <p:spPr>
+          <a:xfrm>
+            <a:off x="6492240" y="4764024"/>
+            <a:ext cx="5029200" cy="256032"/>
           </a:xfrm>
           <a:prstGeom prst="rect">
             <a:avLst/>
@@ -9561,7 +9863,112 @@
       </p:sp>
       <p:sp>
         <p:nvSpPr>
-          <p:cNvPr id="30" name="Text 28"/>
+          <p:cNvPr id="33" name="Shape 31"/>
+          <p:cNvSpPr/>
+          <p:nvPr/>
+        </p:nvSpPr>
+        <p:spPr>
+          <a:xfrm>
+            <a:off x="6309360" y="5276088"/>
+            <a:ext cx="5394960" cy="786384"/>
+          </a:xfrm>
+          <a:prstGeom prst="roundRect">
+            <a:avLst>
+              <a:gd name="adj" fmla="val 9302"/>
+            </a:avLst>
+          </a:prstGeom>
+          <a:solidFill>
+            <a:srgbClr val="121A2B"/>
+          </a:solidFill>
+          <a:ln w="12700">
+            <a:solidFill>
+              <a:srgbClr val="1E293B"/>
+            </a:solidFill>
+            <a:prstDash val="solid"/>
+          </a:ln>
+        </p:spPr>
+      </p:sp>
+      <p:sp>
+        <p:nvSpPr>
+          <p:cNvPr id="34" name="Text 32"/>
+          <p:cNvSpPr/>
+          <p:nvPr/>
+        </p:nvSpPr>
+        <p:spPr>
+          <a:xfrm>
+            <a:off x="6492240" y="5367528"/>
+            <a:ext cx="5029200" cy="256032"/>
+          </a:xfrm>
+          <a:prstGeom prst="rect">
+            <a:avLst/>
+          </a:prstGeom>
+          <a:noFill/>
+          <a:ln/>
+        </p:spPr>
+        <p:txBody>
+          <a:bodyPr wrap="square" lIns="0" tIns="0" rIns="0" bIns="0" rtlCol="0" anchor="ctr"/>
+          <a:lstStyle/>
+          <a:p>
+            <a:pPr indent="0" marL="0">
+              <a:buNone/>
+            </a:pPr>
+            <a:r>
+              <a:rPr lang="en-US" sz="1400" b="1" dirty="0">
+                <a:solidFill>
+                  <a:srgbClr val="FFFFFF"/>
+                </a:solidFill>
+                <a:latin typeface="Noto Sans CJK SC" pitchFamily="34" charset="0"/>
+                <a:ea typeface="Noto Sans CJK SC" pitchFamily="34" charset="-122"/>
+                <a:cs typeface="Noto Sans CJK SC" pitchFamily="34" charset="-120"/>
+              </a:rPr>
+              <a:t>代理隔离</a:t>
+            </a:r>
+            <a:endParaRPr lang="en-US" sz="1400" dirty="0"/>
+          </a:p>
+        </p:txBody>
+      </p:sp>
+      <p:sp>
+        <p:nvSpPr>
+          <p:cNvPr id="35" name="Text 33"/>
+          <p:cNvSpPr/>
+          <p:nvPr/>
+        </p:nvSpPr>
+        <p:spPr>
+          <a:xfrm>
+            <a:off x="6492240" y="5660136"/>
+            <a:ext cx="5029200" cy="256032"/>
+          </a:xfrm>
+          <a:prstGeom prst="rect">
+            <a:avLst/>
+          </a:prstGeom>
+          <a:noFill/>
+          <a:ln/>
+        </p:spPr>
+        <p:txBody>
+          <a:bodyPr wrap="square" lIns="0" tIns="0" rIns="0" bIns="0" rtlCol="0" anchor="ctr"/>
+          <a:lstStyle/>
+          <a:p>
+            <a:pPr indent="0" marL="0">
+              <a:buNone/>
+            </a:pPr>
+            <a:r>
+              <a:rPr lang="en-US" sz="1200" dirty="0">
+                <a:solidFill>
+                  <a:srgbClr val="94A3B8"/>
+                </a:solidFill>
+                <a:latin typeface="Noto Sans CJK SC" pitchFamily="34" charset="0"/>
+                <a:ea typeface="Noto Sans CJK SC" pitchFamily="34" charset="-122"/>
+                <a:cs typeface="Noto Sans CJK SC" pitchFamily="34" charset="-120"/>
+              </a:rPr>
+              <a:t>环回流量强制 trust_env=false</a:t>
+            </a:r>
+            <a:endParaRPr lang="en-US" sz="1200" dirty="0"/>
+          </a:p>
+        </p:txBody>
+      </p:sp>
+      <p:sp>
+        <p:nvSpPr>
+          <p:cNvPr id="36" name="Text 34"/>
           <p:cNvSpPr/>
           <p:nvPr/>
         </p:nvSpPr>
@@ -9600,7 +10007,7 @@
       </p:sp>
       <p:sp>
         <p:nvSpPr>
-          <p:cNvPr id="31" name="Text 29"/>
+          <p:cNvPr id="37" name="Text 35"/>
           <p:cNvSpPr/>
           <p:nvPr/>
         </p:nvSpPr>
@@ -9688,10 +10095,6 @@
           </a:solidFill>
           <a:ln/>
         </p:spPr>
-        <p:txBody>
-          <a:bodyPr/>
-          <a:p/>
-        </p:txBody>
       </p:sp>
       <p:sp>
         <p:nvSpPr>
@@ -9870,10 +10273,6 @@
             <a:prstDash val="solid"/>
           </a:ln>
         </p:spPr>
-        <p:txBody>
-          <a:bodyPr/>
-          <a:p/>
-        </p:txBody>
       </p:sp>
       <p:sp>
         <p:nvSpPr>

--- a/submit/02_答辩材料_v1.pptx
+++ b/submit/02_答辩材料_v1.pptx
@@ -5125,7 +5125,7 @@
                 <a:ea typeface="Noto Sans CJK SC" pitchFamily="34" charset="-122"/>
                 <a:cs typeface="Noto Sans CJK SC" pitchFamily="34" charset="-120"/>
               </a:rPr>
-              <a:t>131 passed（pytest）</a:t>
+              <a:t>135 passed（pytest）</a:t>
             </a:r>
             <a:endParaRPr lang="en-US" sz="1300" dirty="0"/>
           </a:p>
@@ -8644,7 +8644,7 @@
                 <a:ea typeface="Noto Sans CJK SC" pitchFamily="34" charset="-122"/>
                 <a:cs typeface="Noto Sans CJK SC" pitchFamily="34" charset="-120"/>
               </a:rPr>
-              <a:t>单测 131 passed · 对抗集 108/111 · 仍失败 3 条逐条交底：E10/T23 属评测集口径冲突（E01「转 5000」期望放行、金额相同），B01 未指明改哪个订阅故先问清 · 指标口径【待依灵确认】前不对外签章引用</a:t>
+              <a:t>对照实验：同一份评测集，加合规门 98.2%｜不加（只靠银行侧兜底）43.9% —— 应拦 125 条，无门只拦得住 32 条。单测 135 passed · 对抗集 108/111 · 仍失败 3 条逐条交底：E10/T23 属口径冲突、B01 主动取舍 · 指标口径【待依灵确认】前不对外签章引用</a:t>
             </a:r>
             <a:endParaRPr lang="en-US" sz="950" dirty="0"/>
           </a:p>

--- a/submit/02_答辩材料_v1.pptx
+++ b/submit/02_答辩材料_v1.pptx
@@ -3691,7 +3691,7 @@
                 <a:ea typeface="Noto Sans CJK SC" pitchFamily="34" charset="-122"/>
                 <a:cs typeface="Noto Sans CJK SC" pitchFamily="34" charset="-120"/>
               </a:rPr>
-              <a:t>1. 规则先行，模型后置 —— YAML 管「能不能」，LLM 管「怎么说」</a:t>
+              <a:t>1. 规则先行 —— YAML 管「能不能」；当前版本未接 LLM，拦/放行全由规则决定</a:t>
             </a:r>
             <a:endParaRPr lang="en-US" sz="1400" dirty="0"/>
           </a:p>

--- a/submit/02_答辩材料_v1.pptx
+++ b/submit/02_答辩材料_v1.pptx
@@ -10321,8 +10321,8 @@
         </p:nvSpPr>
         <p:spPr>
           <a:xfrm>
-            <a:off x="868680" y="4709160"/>
-            <a:ext cx="10332720" cy="822960"/>
+            <a:off x="868680" y="4663440"/>
+            <a:ext cx="10332720" cy="914400"/>
           </a:xfrm>
           <a:prstGeom prst="rect">
             <a:avLst/>
@@ -10364,6 +10364,23 @@
                 <a:cs typeface="Noto Sans CJK SC" pitchFamily="34" charset="-120"/>
               </a:rPr>
               <a:t>对接：风险等级 · 产品目录 · 话术库 · 行内审计平台  ·  KPI：误导投诉 / 拦截率 / 复核工时</a:t>
+            </a:r>
+            <a:endParaRPr lang="en-US" sz="1300" dirty="0"/>
+          </a:p>
+          <a:p>
+            <a:pPr indent="0" marL="0">
+              <a:buNone/>
+            </a:pPr>
+            <a:r>
+              <a:rPr lang="en-US" sz="1300" dirty="0">
+                <a:solidFill>
+                  <a:srgbClr val="94A3B8"/>
+                </a:solidFill>
+                <a:latin typeface="Noto Sans CJK SC" pitchFamily="34" charset="0"/>
+                <a:ea typeface="Noto Sans CJK SC" pitchFamily="34" charset="-122"/>
+                <a:cs typeface="Noto Sans CJK SC" pitchFamily="34" charset="-120"/>
+              </a:rPr>
+              <a:t>性能：合规门稳态 2–3 ms（p95 &lt; 5ms），串在销售链路上不会成为瓶颈</a:t>
             </a:r>
             <a:endParaRPr lang="en-US" sz="1300" dirty="0"/>
           </a:p>

--- a/submit/02_答辩材料_v1.pptx
+++ b/submit/02_答辩材料_v1.pptx
@@ -5125,7 +5125,7 @@
                 <a:ea typeface="Noto Sans CJK SC" pitchFamily="34" charset="-122"/>
                 <a:cs typeface="Noto Sans CJK SC" pitchFamily="34" charset="-120"/>
               </a:rPr>
-              <a:t>135 passed（pytest）</a:t>
+              <a:t>137 passed（pytest）</a:t>
             </a:r>
             <a:endParaRPr lang="en-US" sz="1300" dirty="0"/>
           </a:p>
@@ -8644,7 +8644,7 @@
                 <a:ea typeface="Noto Sans CJK SC" pitchFamily="34" charset="-122"/>
                 <a:cs typeface="Noto Sans CJK SC" pitchFamily="34" charset="-120"/>
               </a:rPr>
-              <a:t>对照实验：同一份评测集，加合规门 98.2%｜不加（只靠银行侧兜底）43.9% —— 应拦 125 条，无门只拦得住 32 条。单测 135 passed · 对抗集 108/111 · 仍失败 3 条逐条交底：E10/T23 属口径冲突、B01 主动取舍 · 指标口径【待依灵确认】前不对外签章引用</a:t>
+              <a:t>对照实验：同一份评测集，加合规门 98.2%｜不加（只靠银行侧兜底）43.9% —— 应拦 125 条，无门只拦得住 32 条。单测 137 passed · 对抗集 108/111 · 仍失败 3 条逐条交底：E10/T23 属口径冲突、B01 主动取舍 · 指标口径【待依灵确认】前不对外签章引用</a:t>
             </a:r>
             <a:endParaRPr lang="en-US" sz="950" dirty="0"/>
           </a:p>
